--- a/AASA_Final_Pitch_Deck.pptx
+++ b/AASA_Final_Pitch_Deck.pptx
@@ -12,6 +12,7 @@
     <p:sldId id="260" r:id="rId6"/>
     <p:sldId id="261" r:id="rId7"/>
     <p:sldId id="262" r:id="rId8"/>
+    <p:sldId id="266" r:id="rId17"/>
     <p:sldId id="263" r:id="rId9"/>
     <p:sldId id="264" r:id="rId10"/>
     <p:sldId id="265" r:id="rId11"/>
@@ -641,6 +642,94 @@
 </p:notes>
 </file>
 
+<file path=ppt/notesSlides/notesSlide11.xml><?xml version="1.0" encoding="utf-8"?>
+<p:notes xmlns:a="http://schemas.openxmlformats.org/drawingml/2006/main" xmlns:r="http://schemas.openxmlformats.org/officeDocument/2006/relationships" xmlns:p="http://schemas.openxmlformats.org/presentationml/2006/main">
+  <p:cSld>
+    <p:spTree>
+      <p:nvGrpSpPr>
+        <p:cNvPr id="1" name=""/>
+        <p:cNvGrpSpPr/>
+        <p:nvPr/>
+      </p:nvGrpSpPr>
+      <p:grpSpPr>
+        <a:xfrm>
+          <a:off x="0" y="0"/>
+          <a:ext cx="0" cy="0"/>
+          <a:chOff x="0" y="0"/>
+          <a:chExt cx="0" cy="0"/>
+        </a:xfrm>
+      </p:grpSpPr>
+      <p:sp>
+        <p:nvSpPr>
+          <p:cNvPr id="2" name="Slide Image Placeholder 1"/>
+          <p:cNvSpPr>
+            <a:spLocks noGrp="1" noRot="1" noChangeAspect="1"/>
+          </p:cNvSpPr>
+          <p:nvPr>
+            <p:ph type="sldImg"/>
+          </p:nvPr>
+        </p:nvSpPr>
+        <p:spPr/>
+      </p:sp>
+      <p:sp>
+        <p:nvSpPr>
+          <p:cNvPr id="3" name="Notes Placeholder 2"/>
+          <p:cNvSpPr>
+            <a:spLocks noGrp="1"/>
+          </p:cNvSpPr>
+          <p:nvPr>
+            <p:ph type="body" idx="1"/>
+          </p:nvPr>
+        </p:nvSpPr>
+        <p:spPr/>
+        <p:txBody>
+          <a:bodyPr/>
+          <a:lstStyle/>
+          <a:p>
+            <a:r>
+              <a:rPr lang="en-US" dirty="0"/>
+              <a:t>This is the slide that shows we test our own work, not just the product. Walk the six steps in order — the honest beat is 04: the failure was in our test harness, which assumed anything selectable must have evidence. Then 05 is the payoff: chasing it found a banner claim that was false for 47% of possible queries, and we fixed it before submission rather than shipping it. Expect the question "how did you know to look?" — answer: we widened a passing test until it failed. Full record in Build Guide 35, dated.</a:t>
+            </a:r>
+            <a:endParaRPr lang="en-US" dirty="0"/>
+          </a:p>
+        </p:txBody>
+      </p:sp>
+      <p:sp>
+        <p:nvSpPr>
+          <p:cNvPr id="4" name="Slide Number Placeholder 3"/>
+          <p:cNvSpPr>
+            <a:spLocks noGrp="1"/>
+          </p:cNvSpPr>
+          <p:nvPr>
+            <p:ph type="sldNum" sz="quarter" idx="10"/>
+          </p:nvPr>
+        </p:nvSpPr>
+        <p:spPr/>
+        <p:txBody>
+          <a:bodyPr/>
+          <a:lstStyle/>
+          <a:p>
+            <a:fld id="{F7021451-1387-4CA6-816F-3879F97B5CBC}" type="slidenum">
+              <a:rPr lang="en-US"/>
+              <a:t>8</a:t>
+            </a:fld>
+            <a:endParaRPr lang="en-US"/>
+          </a:p>
+        </p:txBody>
+      </p:sp>
+    </p:spTree>
+    <p:extLst>
+      <p:ext uri="{BB962C8B-B14F-4D97-AF65-F5344CB8AC3E}">
+        <p14:creationId xmlns:p14="http://schemas.microsoft.com/office/powerpoint/2010/main" val="1024086991"/>
+      </p:ext>
+    </p:extLst>
+  </p:cSld>
+  <p:clrMapOvr>
+    <a:masterClrMapping/>
+  </p:clrMapOvr>
+</p:notes>
+</file>
+
 <file path=ppt/notesSlides/notesSlide2.xml><?xml version="1.0" encoding="utf-8"?>
 <p:notes xmlns:a="http://schemas.openxmlformats.org/drawingml/2006/main" xmlns:r="http://schemas.openxmlformats.org/officeDocument/2006/relationships" xmlns:p="http://schemas.openxmlformats.org/presentationml/2006/main">
   <p:cSld>
@@ -1039,7 +1128,7 @@
           <a:p>
             <a:r>
               <a:rPr lang="en-US" dirty="0"/>
-              <a:t>Two of four targets met, one clearly missed — say the trust-score miss out loud before anyone asks. Our read: credible on evidence, but the cost numbers are the trust bottleneck, which the pricing-sync roadmap item addresses. Numbers copied from P14-Validation-Metrics-Final-v1.md.</a:t>
+              <a:t>All four targets met, including the trust score the earlier round missed. Say the limitation out loud before anyone asks: the build changed AND the participants changed between rounds, so we do not claim our fixes raised trust from 3 to 5 — that would need the same people testing both builds. Point at the credible intervals; 100% net value has a 72-99% interval and one changed answer moves it 12.5 points. If asked who tested: 8 practitioners at 7 real companies (SumUp, BMG, CoachHub, Delivery Hero, AUTODOC, Plan A, Ordio), 5 non-native English speakers, 5 on the regulated posture — all recruited through our own networks, which is convenience sampling and plausibly inflates trust. Numbers regenerate with scripts/telemetry_funnel.py --since '2026-07-27 23:00'.</a:t>
             </a:r>
             <a:endParaRPr lang="en-US" dirty="0"/>
           </a:p>
@@ -2266,7 +2355,7 @@
                 <a:ea typeface="Courier New" pitchFamily="34" charset="-122"/>
                 <a:cs typeface="Courier New" pitchFamily="34" charset="-120"/>
               </a:rPr>
-              <a:t>09 · WHERE THIS GOES</a:t>
+              <a:t>10 · WHERE THIS GOES</a:t>
             </a:r>
             <a:endParaRPr lang="en-US" sz="1100" dirty="0"/>
           </a:p>
@@ -2631,87 +2720,1415 @@
                 <a:ea typeface="Arial" pitchFamily="34" charset="-122"/>
                 <a:cs typeface="Arial" pitchFamily="34" charset="-120"/>
               </a:rPr>
-              <a:t>Reporting a missed target earns more trust than hiding it</a:t>
+              <a:t>Reporting a missed target — then not claiming credit when it passes</a:t>
             </a:r>
             <a:endParaRPr lang="en-US" sz="1350" dirty="0"/>
           </a:p>
-        </p:txBody>
-      </p:sp>
-      <p:sp>
-        <p:nvSpPr>
-          <p:cNvPr id="10" name="Text 8"/>
-          <p:cNvSpPr/>
-          <p:nvPr/>
-        </p:nvSpPr>
-        <p:spPr>
-          <a:xfrm>
-            <a:off x="640080" y="5303520"/>
-            <a:ext cx="10881360" cy="457200"/>
-          </a:xfrm>
-          <a:prstGeom prst="rect">
-            <a:avLst/>
-          </a:prstGeom>
-          <a:noFill/>
-          <a:ln/>
-        </p:spPr>
-        <p:txBody>
-          <a:bodyPr wrap="square" lIns="0" tIns="0" rIns="0" bIns="0" rtlCol="0" anchor="t"/>
-          <a:lstStyle/>
-          <a:p>
-            <a:pPr indent="0" marL="0">
-              <a:buNone/>
-            </a:pPr>
-            <a:r>
-              <a:rPr lang="en-US" sz="2000" b="1" dirty="0">
-                <a:solidFill>
-                  <a:srgbClr val="818CF8"/>
+          <a:p>
+            <a:pPr marL="342900" indent="-342900">
+              <a:spcAft>
+                <a:spcPts val="1000"/>
+              </a:spcAft>
+              <a:buSzPct val="100000"/>
+              <a:buChar char="•"/>
+            </a:pPr>
+            <a:r>
+              <a:rPr lang="en-US" sz="1350" dirty="0">
+                <a:solidFill>
+                  <a:srgbClr val="F5F1EA"/>
                 </a:solidFill>
                 <a:latin typeface="Arial" pitchFamily="34" charset="0"/>
                 <a:ea typeface="Arial" pitchFamily="34" charset="-122"/>
                 <a:cs typeface="Arial" pitchFamily="34" charset="-120"/>
               </a:rPr>
-              <a:t>Built by two people, in four weeks, on 3,023 real deployments.</a:t>
-            </a:r>
-            <a:endParaRPr lang="en-US" sz="2000" dirty="0"/>
-          </a:p>
-        </p:txBody>
-      </p:sp>
-      <p:sp>
-        <p:nvSpPr>
-          <p:cNvPr id="11" name="Text 9"/>
-          <p:cNvSpPr/>
-          <p:nvPr/>
-        </p:nvSpPr>
-        <p:spPr>
-          <a:xfrm>
-            <a:off x="640080" y="5779008"/>
-            <a:ext cx="10881360" cy="365760"/>
-          </a:xfrm>
-          <a:prstGeom prst="rect">
-            <a:avLst/>
-          </a:prstGeom>
-          <a:noFill/>
-          <a:ln/>
-        </p:spPr>
-        <p:txBody>
-          <a:bodyPr wrap="square" lIns="0" tIns="0" rIns="0" bIns="0" rtlCol="0" anchor="t"/>
-          <a:lstStyle/>
-          <a:p>
-            <a:pPr indent="0" marL="0">
-              <a:buNone/>
-            </a:pPr>
-            <a:r>
-              <a:rPr lang="en-US" sz="1400" i="1" dirty="0">
-                <a:solidFill>
-                  <a:srgbClr val="9AA4B2"/>
+              <a:t>A test you widen until it fails teaches more than one that passes</a:t>
+            </a:r>
+            <a:endParaRPr lang="en-US" sz="1350" dirty="0"/>
+          </a:p>
+        </p:txBody>
+      </p:sp>
+      <p:sp>
+        <p:nvSpPr>
+          <p:cNvPr id="10" name="Text 8"/>
+          <p:cNvSpPr/>
+          <p:nvPr/>
+        </p:nvSpPr>
+        <p:spPr>
+          <a:xfrm>
+            <a:off x="640080" y="5303520"/>
+            <a:ext cx="10881360" cy="457200"/>
+          </a:xfrm>
+          <a:prstGeom prst="rect">
+            <a:avLst/>
+          </a:prstGeom>
+          <a:noFill/>
+          <a:ln/>
+        </p:spPr>
+        <p:txBody>
+          <a:bodyPr wrap="square" lIns="0" tIns="0" rIns="0" bIns="0" rtlCol="0" anchor="t"/>
+          <a:lstStyle/>
+          <a:p>
+            <a:pPr indent="0" marL="0">
+              <a:buNone/>
+            </a:pPr>
+            <a:r>
+              <a:rPr lang="en-US" sz="2000" b="1" dirty="0">
+                <a:solidFill>
+                  <a:srgbClr val="818CF8"/>
                 </a:solidFill>
                 <a:latin typeface="Arial" pitchFamily="34" charset="0"/>
                 <a:ea typeface="Arial" pitchFamily="34" charset="-122"/>
                 <a:cs typeface="Arial" pitchFamily="34" charset="-120"/>
               </a:rPr>
+              <a:t>Built by two people, in four weeks, on 3,023 real deployments.</a:t>
+            </a:r>
+            <a:endParaRPr lang="en-US" sz="2000" dirty="0"/>
+          </a:p>
+        </p:txBody>
+      </p:sp>
+      <p:sp>
+        <p:nvSpPr>
+          <p:cNvPr id="11" name="Text 9"/>
+          <p:cNvSpPr/>
+          <p:nvPr/>
+        </p:nvSpPr>
+        <p:spPr>
+          <a:xfrm>
+            <a:off x="640080" y="5779008"/>
+            <a:ext cx="10881360" cy="365760"/>
+          </a:xfrm>
+          <a:prstGeom prst="rect">
+            <a:avLst/>
+          </a:prstGeom>
+          <a:noFill/>
+          <a:ln/>
+        </p:spPr>
+        <p:txBody>
+          <a:bodyPr wrap="square" lIns="0" tIns="0" rIns="0" bIns="0" rtlCol="0" anchor="t"/>
+          <a:lstStyle/>
+          <a:p>
+            <a:pPr indent="0" marL="0">
+              <a:buNone/>
+            </a:pPr>
+            <a:r>
+              <a:rPr lang="en-US" sz="1400" i="1" dirty="0">
+                <a:solidFill>
+                  <a:srgbClr val="9AA4B2"/>
+                </a:solidFill>
+                <a:latin typeface="Arial" pitchFamily="34" charset="0"/>
+                <a:ea typeface="Arial" pitchFamily="34" charset="-122"/>
+                <a:cs typeface="Arial" pitchFamily="34" charset="-120"/>
+              </a:rPr>
               <a:t>Questions — including the hard ones about sample size.</a:t>
             </a:r>
             <a:endParaRPr lang="en-US" sz="1400" dirty="0"/>
+          </a:p>
+        </p:txBody>
+      </p:sp>
+    </p:spTree>
+  </p:cSld>
+  <p:clrMapOvr>
+    <a:masterClrMapping/>
+  </p:clrMapOvr>
+</p:sld>
+</file>
+
+<file path=ppt/slides/slide11.xml><?xml version="1.0" encoding="utf-8"?>
+<p:sld xmlns:a="http://schemas.openxmlformats.org/drawingml/2006/main" xmlns:r="http://schemas.openxmlformats.org/officeDocument/2006/relationships" xmlns:p="http://schemas.openxmlformats.org/presentationml/2006/main">
+  <p:cSld name="Slide 5">
+    <p:bg>
+      <p:bgPr>
+        <a:solidFill>
+          <a:srgbClr val="0F1115"/>
+        </a:solidFill>
+      </p:bgPr>
+    </p:bg>
+    <p:spTree>
+      <p:nvGrpSpPr>
+        <p:cNvPr id="1" name=""/>
+        <p:cNvGrpSpPr/>
+        <p:nvPr/>
+      </p:nvGrpSpPr>
+      <p:grpSpPr>
+        <a:xfrm>
+          <a:off x="0" y="0"/>
+          <a:ext cx="0" cy="0"/>
+          <a:chOff x="0" y="0"/>
+          <a:chExt cx="0" cy="0"/>
+        </a:xfrm>
+      </p:grpSpPr>
+      <p:sp>
+        <p:nvSpPr>
+          <p:cNvPr id="2" name="Text 0"/>
+          <p:cNvSpPr/>
+          <p:nvPr/>
+        </p:nvSpPr>
+        <p:spPr>
+          <a:xfrm>
+            <a:off x="640080" y="384048"/>
+            <a:ext cx="10881360" cy="274320"/>
+          </a:xfrm>
+          <a:prstGeom prst="rect">
+            <a:avLst/>
+          </a:prstGeom>
+          <a:noFill/>
+          <a:ln/>
+        </p:spPr>
+        <p:txBody>
+          <a:bodyPr wrap="square" lIns="0" tIns="0" rIns="0" bIns="0" rtlCol="0" anchor="t"/>
+          <a:lstStyle/>
+          <a:p>
+            <a:pPr indent="0" marL="0">
+              <a:buNone/>
+            </a:pPr>
+            <a:r>
+              <a:rPr lang="en-US" sz="1100" b="1" spc="200" kern="0" dirty="0">
+                <a:solidFill>
+                  <a:srgbClr val="818CF8"/>
+                </a:solidFill>
+                <a:latin typeface="Courier New" pitchFamily="34" charset="0"/>
+                <a:ea typeface="Courier New" pitchFamily="34" charset="-122"/>
+                <a:cs typeface="Courier New" pitchFamily="34" charset="-120"/>
+              </a:rPr>
+              <a:t>07 · STRESS-TESTING OUR OWN EVIDENCE</a:t>
+            </a:r>
+            <a:endParaRPr lang="en-US" sz="1100" dirty="0"/>
+          </a:p>
+        </p:txBody>
+      </p:sp>
+      <p:sp>
+        <p:nvSpPr>
+          <p:cNvPr id="3" name="Text 1"/>
+          <p:cNvSpPr/>
+          <p:nvPr/>
+        </p:nvSpPr>
+        <p:spPr>
+          <a:xfrm>
+            <a:off x="640080" y="749808"/>
+            <a:ext cx="10881360" cy="1188720"/>
+          </a:xfrm>
+          <a:prstGeom prst="rect">
+            <a:avLst/>
+          </a:prstGeom>
+          <a:noFill/>
+          <a:ln/>
+        </p:spPr>
+        <p:txBody>
+          <a:bodyPr wrap="square" lIns="0" tIns="0" rIns="0" bIns="0" rtlCol="0" anchor="t"/>
+          <a:lstStyle/>
+          <a:p>
+            <a:pPr indent="0" marL="0">
+              <a:lnSpc>
+                <a:spcPts val="3800"/>
+              </a:lnSpc>
+              <a:buNone/>
+            </a:pPr>
+            <a:r>
+              <a:rPr lang="en-US" sz="3000" b="1" dirty="0">
+                <a:solidFill>
+                  <a:srgbClr val="F5F1EA"/>
+                </a:solidFill>
+                <a:latin typeface="Arial" pitchFamily="34" charset="0"/>
+                <a:ea typeface="Arial" pitchFamily="34" charset="-122"/>
+                <a:cs typeface="Arial" pitchFamily="34" charset="-120"/>
+              </a:rPr>
+              <a:t>We tried to break the retrieval — and found we had over-claimed.</a:t>
+            </a:r>
+            <a:endParaRPr lang="en-US" sz="3000" dirty="0"/>
+          </a:p>
+        </p:txBody>
+      </p:sp>
+      <p:sp>
+        <p:nvSpPr>
+          <p:cNvPr id="4" name="Shape 2"/>
+          <p:cNvSpPr/>
+          <p:nvPr/>
+        </p:nvSpPr>
+        <p:spPr>
+          <a:xfrm>
+            <a:off x="640080" y="2011680"/>
+            <a:ext cx="3383280" cy="1737360"/>
+          </a:xfrm>
+          <a:prstGeom prst="roundRect">
+            <a:avLst>
+              <a:gd name="adj" fmla="val 3158"/>
+            </a:avLst>
+          </a:prstGeom>
+          <a:solidFill>
+            <a:srgbClr val="1B1E26"/>
+          </a:solidFill>
+          <a:ln w="12700">
+            <a:solidFill>
+              <a:srgbClr val="2B2F3A"/>
+            </a:solidFill>
+            <a:prstDash val="solid"/>
+          </a:ln>
+        </p:spPr>
+      </p:sp>
+      <p:sp>
+        <p:nvSpPr>
+          <p:cNvPr id="5" name="Text 3"/>
+          <p:cNvSpPr/>
+          <p:nvPr/>
+        </p:nvSpPr>
+        <p:spPr>
+          <a:xfrm>
+            <a:off x="896112" y="2157984"/>
+            <a:ext cx="1371600" cy="274320"/>
+          </a:xfrm>
+          <a:prstGeom prst="rect">
+            <a:avLst/>
+          </a:prstGeom>
+          <a:noFill/>
+          <a:ln/>
+        </p:spPr>
+        <p:txBody>
+          <a:bodyPr wrap="square" lIns="0" tIns="0" rIns="0" bIns="0" rtlCol="0" anchor="t"/>
+          <a:lstStyle/>
+          <a:p>
+            <a:pPr indent="0" marL="0">
+              <a:buNone/>
+            </a:pPr>
+            <a:r>
+              <a:rPr lang="en-US" sz="1200" b="1" dirty="0">
+                <a:solidFill>
+                  <a:srgbClr val="818CF8"/>
+                </a:solidFill>
+                <a:latin typeface="Courier New" pitchFamily="34" charset="0"/>
+                <a:ea typeface="Courier New" pitchFamily="34" charset="-122"/>
+                <a:cs typeface="Courier New" pitchFamily="34" charset="-120"/>
+              </a:rPr>
+              <a:t>01</a:t>
+            </a:r>
+            <a:endParaRPr lang="en-US" sz="1200" dirty="0"/>
+          </a:p>
+        </p:txBody>
+      </p:sp>
+      <p:sp>
+        <p:nvSpPr>
+          <p:cNvPr id="6" name="Text 4"/>
+          <p:cNvSpPr/>
+          <p:nvPr/>
+        </p:nvSpPr>
+        <p:spPr>
+          <a:xfrm>
+            <a:off x="896112" y="2450592"/>
+            <a:ext cx="2880360" cy="292608"/>
+          </a:xfrm>
+          <a:prstGeom prst="rect">
+            <a:avLst/>
+          </a:prstGeom>
+          <a:noFill/>
+          <a:ln/>
+        </p:spPr>
+        <p:txBody>
+          <a:bodyPr wrap="square" lIns="0" tIns="0" rIns="0" bIns="0" rtlCol="0" anchor="t"/>
+          <a:lstStyle/>
+          <a:p>
+            <a:pPr indent="0" marL="0">
+              <a:buNone/>
+            </a:pPr>
+            <a:r>
+              <a:rPr lang="en-US" sz="1500" b="1" dirty="0">
+                <a:solidFill>
+                  <a:srgbClr val="F5F1EA"/>
+                </a:solidFill>
+                <a:latin typeface="Arial" pitchFamily="34" charset="0"/>
+                <a:ea typeface="Arial" pitchFamily="34" charset="-122"/>
+                <a:cs typeface="Arial" pitchFamily="34" charset="-120"/>
+              </a:rPr>
+              <a:t>A CUTOFF WAS ADDED</a:t>
+            </a:r>
+            <a:endParaRPr lang="en-US" sz="1500" dirty="0"/>
+          </a:p>
+        </p:txBody>
+      </p:sp>
+      <p:sp>
+        <p:nvSpPr>
+          <p:cNvPr id="7" name="Text 5"/>
+          <p:cNvSpPr/>
+          <p:nvPr/>
+        </p:nvSpPr>
+        <p:spPr>
+          <a:xfrm>
+            <a:off x="896112" y="2779776"/>
+            <a:ext cx="2880360" cy="329184"/>
+          </a:xfrm>
+          <a:prstGeom prst="rect">
+            <a:avLst/>
+          </a:prstGeom>
+          <a:noFill/>
+          <a:ln/>
+        </p:spPr>
+        <p:txBody>
+          <a:bodyPr wrap="square" lIns="0" tIns="0" rIns="0" bIns="0" rtlCol="0" anchor="t"/>
+          <a:lstStyle/>
+          <a:p>
+            <a:pPr indent="0" marL="0">
+              <a:buNone/>
+            </a:pPr>
+            <a:r>
+              <a:rPr lang="en-US" sz="1250" dirty="0">
+                <a:solidFill>
+                  <a:srgbClr val="F5F1EA"/>
+                </a:solidFill>
+                <a:latin typeface="Arial" pitchFamily="34" charset="0"/>
+                <a:ea typeface="Arial" pitchFamily="34" charset="-122"/>
+                <a:cs typeface="Arial" pitchFamily="34" charset="-120"/>
+              </a:rPr>
+              <a:t>Gabi shipped a relevance threshold</a:t>
+            </a:r>
+            <a:endParaRPr lang="en-US" sz="1250" dirty="0"/>
+          </a:p>
+        </p:txBody>
+      </p:sp>
+      <p:sp>
+        <p:nvSpPr>
+          <p:cNvPr id="8" name="Text 6"/>
+          <p:cNvSpPr/>
+          <p:nvPr/>
+        </p:nvSpPr>
+        <p:spPr>
+          <a:xfrm>
+            <a:off x="896112" y="3145536"/>
+            <a:ext cx="2880360" cy="548640"/>
+          </a:xfrm>
+          <a:prstGeom prst="rect">
+            <a:avLst/>
+          </a:prstGeom>
+          <a:noFill/>
+          <a:ln/>
+        </p:spPr>
+        <p:txBody>
+          <a:bodyPr wrap="square" lIns="0" tIns="0" rIns="0" bIns="0" rtlCol="0" anchor="t"/>
+          <a:lstStyle/>
+          <a:p>
+            <a:pPr indent="0" marL="0">
+              <a:lnSpc>
+                <a:spcPts val="1500"/>
+              </a:lnSpc>
+              <a:buNone/>
+            </a:pPr>
+            <a:r>
+              <a:rPr lang="en-US" sz="1150" i="1" dirty="0">
+                <a:solidFill>
+                  <a:srgbClr val="9AA4B2"/>
+                </a:solidFill>
+                <a:latin typeface="Arial" pitchFamily="34" charset="0"/>
+                <a:ea typeface="Arial" pitchFamily="34" charset="-122"/>
+                <a:cs typeface="Arial" pitchFamily="34" charset="-120"/>
+              </a:rPr>
+              <a:t>Before it, every query returned 15 cases however far off they were</a:t>
+            </a:r>
+            <a:endParaRPr lang="en-US" sz="1150" dirty="0"/>
+          </a:p>
+        </p:txBody>
+      </p:sp>
+      <p:sp>
+        <p:nvSpPr>
+          <p:cNvPr id="9" name="Shape 7"/>
+          <p:cNvSpPr/>
+          <p:nvPr/>
+        </p:nvSpPr>
+        <p:spPr>
+          <a:xfrm>
+            <a:off x="4297680" y="2011680"/>
+            <a:ext cx="3383280" cy="1737360"/>
+          </a:xfrm>
+          <a:prstGeom prst="roundRect">
+            <a:avLst>
+              <a:gd name="adj" fmla="val 3158"/>
+            </a:avLst>
+          </a:prstGeom>
+          <a:solidFill>
+            <a:srgbClr val="1B1E26"/>
+          </a:solidFill>
+          <a:ln w="12700">
+            <a:solidFill>
+              <a:srgbClr val="2B2F3A"/>
+            </a:solidFill>
+            <a:prstDash val="solid"/>
+          </a:ln>
+        </p:spPr>
+      </p:sp>
+      <p:sp>
+        <p:nvSpPr>
+          <p:cNvPr id="10" name="Text 8"/>
+          <p:cNvSpPr/>
+          <p:nvPr/>
+        </p:nvSpPr>
+        <p:spPr>
+          <a:xfrm>
+            <a:off x="4553712" y="2157984"/>
+            <a:ext cx="1371600" cy="274320"/>
+          </a:xfrm>
+          <a:prstGeom prst="rect">
+            <a:avLst/>
+          </a:prstGeom>
+          <a:noFill/>
+          <a:ln/>
+        </p:spPr>
+        <p:txBody>
+          <a:bodyPr wrap="square" lIns="0" tIns="0" rIns="0" bIns="0" rtlCol="0" anchor="t"/>
+          <a:lstStyle/>
+          <a:p>
+            <a:pPr indent="0" marL="0">
+              <a:buNone/>
+            </a:pPr>
+            <a:r>
+              <a:rPr lang="en-US" sz="1200" b="1" dirty="0">
+                <a:solidFill>
+                  <a:srgbClr val="818CF8"/>
+                </a:solidFill>
+                <a:latin typeface="Courier New" pitchFamily="34" charset="0"/>
+                <a:ea typeface="Courier New" pitchFamily="34" charset="-122"/>
+                <a:cs typeface="Courier New" pitchFamily="34" charset="-120"/>
+              </a:rPr>
+              <a:t>02</a:t>
+            </a:r>
+            <a:endParaRPr lang="en-US" sz="1200" dirty="0"/>
+          </a:p>
+        </p:txBody>
+      </p:sp>
+      <p:sp>
+        <p:nvSpPr>
+          <p:cNvPr id="11" name="Text 9"/>
+          <p:cNvSpPr/>
+          <p:nvPr/>
+        </p:nvSpPr>
+        <p:spPr>
+          <a:xfrm>
+            <a:off x="4553712" y="2450592"/>
+            <a:ext cx="2880360" cy="292608"/>
+          </a:xfrm>
+          <a:prstGeom prst="rect">
+            <a:avLst/>
+          </a:prstGeom>
+          <a:noFill/>
+          <a:ln/>
+        </p:spPr>
+        <p:txBody>
+          <a:bodyPr wrap="square" lIns="0" tIns="0" rIns="0" bIns="0" rtlCol="0" anchor="t"/>
+          <a:lstStyle/>
+          <a:p>
+            <a:pPr indent="0" marL="0">
+              <a:buNone/>
+            </a:pPr>
+            <a:r>
+              <a:rPr lang="en-US" sz="1500" b="1" dirty="0">
+                <a:solidFill>
+                  <a:srgbClr val="F5F1EA"/>
+                </a:solidFill>
+                <a:latin typeface="Arial" pitchFamily="34" charset="0"/>
+                <a:ea typeface="Arial" pitchFamily="34" charset="-122"/>
+                <a:cs typeface="Arial" pitchFamily="34" charset="-120"/>
+              </a:rPr>
+              <a:t>WE WIDENED THE TEST</a:t>
+            </a:r>
+            <a:endParaRPr lang="en-US" sz="1500" dirty="0"/>
+          </a:p>
+        </p:txBody>
+      </p:sp>
+      <p:sp>
+        <p:nvSpPr>
+          <p:cNvPr id="12" name="Text 10"/>
+          <p:cNvSpPr/>
+          <p:nvPr/>
+        </p:nvSpPr>
+        <p:spPr>
+          <a:xfrm>
+            <a:off x="4553712" y="2779776"/>
+            <a:ext cx="2880360" cy="329184"/>
+          </a:xfrm>
+          <a:prstGeom prst="rect">
+            <a:avLst/>
+          </a:prstGeom>
+          <a:noFill/>
+          <a:ln/>
+        </p:spPr>
+        <p:txBody>
+          <a:bodyPr wrap="square" lIns="0" tIns="0" rIns="0" bIns="0" rtlCol="0" anchor="t"/>
+          <a:lstStyle/>
+          <a:p>
+            <a:pPr indent="0" marL="0">
+              <a:buNone/>
+            </a:pPr>
+            <a:r>
+              <a:rPr lang="en-US" sz="1250" dirty="0">
+                <a:solidFill>
+                  <a:srgbClr val="F5F1EA"/>
+                </a:solidFill>
+                <a:latin typeface="Arial" pitchFamily="34" charset="0"/>
+                <a:ea typeface="Arial" pitchFamily="34" charset="-122"/>
+                <a:cs typeface="Arial" pitchFamily="34" charset="-120"/>
+              </a:rPr>
+              <a:t>8 hand-picked queries → all 432</a:t>
+            </a:r>
+            <a:endParaRPr lang="en-US" sz="1250" dirty="0"/>
+          </a:p>
+        </p:txBody>
+      </p:sp>
+      <p:sp>
+        <p:nvSpPr>
+          <p:cNvPr id="13" name="Text 11"/>
+          <p:cNvSpPr/>
+          <p:nvPr/>
+        </p:nvSpPr>
+        <p:spPr>
+          <a:xfrm>
+            <a:off x="4553712" y="3145536"/>
+            <a:ext cx="2880360" cy="548640"/>
+          </a:xfrm>
+          <a:prstGeom prst="rect">
+            <a:avLst/>
+          </a:prstGeom>
+          <a:noFill/>
+          <a:ln/>
+        </p:spPr>
+        <p:txBody>
+          <a:bodyPr wrap="square" lIns="0" tIns="0" rIns="0" bIns="0" rtlCol="0" anchor="t"/>
+          <a:lstStyle/>
+          <a:p>
+            <a:pPr indent="0" marL="0">
+              <a:lnSpc>
+                <a:spcPts val="1500"/>
+              </a:lnSpc>
+              <a:buNone/>
+            </a:pPr>
+            <a:r>
+              <a:rPr lang="en-US" sz="1150" i="1" dirty="0">
+                <a:solidFill>
+                  <a:srgbClr val="9AA4B2"/>
+                </a:solidFill>
+                <a:latin typeface="Arial" pitchFamily="34" charset="0"/>
+                <a:ea typeface="Arial" pitchFamily="34" charset="-122"/>
+                <a:cs typeface="Arial" pitchFamily="34" charset="-120"/>
+              </a:rPr>
+              <a:t>Every workflow x industry pair the dropdowns can produce</a:t>
+            </a:r>
+            <a:endParaRPr lang="en-US" sz="1150" dirty="0"/>
+          </a:p>
+        </p:txBody>
+      </p:sp>
+      <p:sp>
+        <p:nvSpPr>
+          <p:cNvPr id="14" name="Shape 12"/>
+          <p:cNvSpPr/>
+          <p:nvPr/>
+        </p:nvSpPr>
+        <p:spPr>
+          <a:xfrm>
+            <a:off x="7955280" y="2011680"/>
+            <a:ext cx="3383280" cy="1737360"/>
+          </a:xfrm>
+          <a:prstGeom prst="roundRect">
+            <a:avLst>
+              <a:gd name="adj" fmla="val 3158"/>
+            </a:avLst>
+          </a:prstGeom>
+          <a:solidFill>
+            <a:srgbClr val="1B1E26"/>
+          </a:solidFill>
+          <a:ln w="12700">
+            <a:solidFill>
+              <a:srgbClr val="2B2F3A"/>
+            </a:solidFill>
+            <a:prstDash val="solid"/>
+          </a:ln>
+        </p:spPr>
+      </p:sp>
+      <p:sp>
+        <p:nvSpPr>
+          <p:cNvPr id="15" name="Text 13"/>
+          <p:cNvSpPr/>
+          <p:nvPr/>
+        </p:nvSpPr>
+        <p:spPr>
+          <a:xfrm>
+            <a:off x="8211312" y="2157984"/>
+            <a:ext cx="1371600" cy="274320"/>
+          </a:xfrm>
+          <a:prstGeom prst="rect">
+            <a:avLst/>
+          </a:prstGeom>
+          <a:noFill/>
+          <a:ln/>
+        </p:spPr>
+        <p:txBody>
+          <a:bodyPr wrap="square" lIns="0" tIns="0" rIns="0" bIns="0" rtlCol="0" anchor="t"/>
+          <a:lstStyle/>
+          <a:p>
+            <a:pPr indent="0" marL="0">
+              <a:buNone/>
+            </a:pPr>
+            <a:r>
+              <a:rPr lang="en-US" sz="1200" b="1" dirty="0">
+                <a:solidFill>
+                  <a:srgbClr val="818CF8"/>
+                </a:solidFill>
+                <a:latin typeface="Courier New" pitchFamily="34" charset="0"/>
+                <a:ea typeface="Courier New" pitchFamily="34" charset="-122"/>
+                <a:cs typeface="Courier New" pitchFamily="34" charset="-120"/>
+              </a:rPr>
+              <a:t>03</a:t>
+            </a:r>
+            <a:endParaRPr lang="en-US" sz="1200" dirty="0"/>
+          </a:p>
+        </p:txBody>
+      </p:sp>
+      <p:sp>
+        <p:nvSpPr>
+          <p:cNvPr id="16" name="Text 14"/>
+          <p:cNvSpPr/>
+          <p:nvPr/>
+        </p:nvSpPr>
+        <p:spPr>
+          <a:xfrm>
+            <a:off x="8211312" y="2450592"/>
+            <a:ext cx="2880360" cy="292608"/>
+          </a:xfrm>
+          <a:prstGeom prst="rect">
+            <a:avLst/>
+          </a:prstGeom>
+          <a:noFill/>
+          <a:ln/>
+        </p:spPr>
+        <p:txBody>
+          <a:bodyPr wrap="square" lIns="0" tIns="0" rIns="0" bIns="0" rtlCol="0" anchor="t"/>
+          <a:lstStyle/>
+          <a:p>
+            <a:pPr indent="0" marL="0">
+              <a:buNone/>
+            </a:pPr>
+            <a:r>
+              <a:rPr lang="en-US" sz="1500" b="1" dirty="0">
+                <a:solidFill>
+                  <a:srgbClr val="F5F1EA"/>
+                </a:solidFill>
+                <a:latin typeface="Arial" pitchFamily="34" charset="0"/>
+                <a:ea typeface="Arial" pitchFamily="34" charset="-122"/>
+                <a:cs typeface="Arial" pitchFamily="34" charset="-120"/>
+              </a:rPr>
+              <a:t>IT FAILED</a:t>
+            </a:r>
+            <a:endParaRPr lang="en-US" sz="1500" dirty="0"/>
+          </a:p>
+        </p:txBody>
+      </p:sp>
+      <p:sp>
+        <p:nvSpPr>
+          <p:cNvPr id="17" name="Text 15"/>
+          <p:cNvSpPr/>
+          <p:nvPr/>
+        </p:nvSpPr>
+        <p:spPr>
+          <a:xfrm>
+            <a:off x="8211312" y="2779776"/>
+            <a:ext cx="2880360" cy="329184"/>
+          </a:xfrm>
+          <a:prstGeom prst="rect">
+            <a:avLst/>
+          </a:prstGeom>
+          <a:noFill/>
+          <a:ln/>
+        </p:spPr>
+        <p:txBody>
+          <a:bodyPr wrap="square" lIns="0" tIns="0" rIns="0" bIns="0" rtlCol="0" anchor="t"/>
+          <a:lstStyle/>
+          <a:p>
+            <a:pPr indent="0" marL="0">
+              <a:buNone/>
+            </a:pPr>
+            <a:r>
+              <a:rPr lang="en-US" sz="1250" dirty="0">
+                <a:solidFill>
+                  <a:srgbClr val="F5F1EA"/>
+                </a:solidFill>
+                <a:latin typeface="Arial" pitchFamily="34" charset="0"/>
+                <a:ea typeface="Arial" pitchFamily="34" charset="-122"/>
+                <a:cs typeface="Arial" pitchFamily="34" charset="-120"/>
+              </a:rPr>
+              <a:t>5 combinations returned nothing</a:t>
+            </a:r>
+            <a:endParaRPr lang="en-US" sz="1250" dirty="0"/>
+          </a:p>
+        </p:txBody>
+      </p:sp>
+      <p:sp>
+        <p:nvSpPr>
+          <p:cNvPr id="18" name="Text 16"/>
+          <p:cNvSpPr/>
+          <p:nvPr/>
+        </p:nvSpPr>
+        <p:spPr>
+          <a:xfrm>
+            <a:off x="8211312" y="3145536"/>
+            <a:ext cx="2880360" cy="548640"/>
+          </a:xfrm>
+          <a:prstGeom prst="rect">
+            <a:avLst/>
+          </a:prstGeom>
+          <a:noFill/>
+          <a:ln/>
+        </p:spPr>
+        <p:txBody>
+          <a:bodyPr wrap="square" lIns="0" tIns="0" rIns="0" bIns="0" rtlCol="0" anchor="t"/>
+          <a:lstStyle/>
+          <a:p>
+            <a:pPr indent="0" marL="0">
+              <a:lnSpc>
+                <a:spcPts val="1500"/>
+              </a:lnSpc>
+              <a:buNone/>
+            </a:pPr>
+            <a:r>
+              <a:rPr lang="en-US" sz="1150" i="1" dirty="0">
+                <a:solidFill>
+                  <a:srgbClr val="9AA4B2"/>
+                </a:solidFill>
+                <a:latin typeface="Arial" pitchFamily="34" charset="0"/>
+                <a:ea typeface="Arial" pitchFamily="34" charset="-122"/>
+                <a:cs typeface="Arial" pitchFamily="34" charset="-120"/>
+              </a:rPr>
+              <a:t>Procurement in Education, Sales in Education, and three more</a:t>
+            </a:r>
+            <a:endParaRPr lang="en-US" sz="1150" dirty="0"/>
+          </a:p>
+        </p:txBody>
+      </p:sp>
+      <p:sp>
+        <p:nvSpPr>
+          <p:cNvPr id="19" name="Shape 17"/>
+          <p:cNvSpPr/>
+          <p:nvPr/>
+        </p:nvSpPr>
+        <p:spPr>
+          <a:xfrm>
+            <a:off x="640080" y="4005072"/>
+            <a:ext cx="3383280" cy="1737360"/>
+          </a:xfrm>
+          <a:prstGeom prst="roundRect">
+            <a:avLst>
+              <a:gd name="adj" fmla="val 3158"/>
+            </a:avLst>
+          </a:prstGeom>
+          <a:solidFill>
+            <a:srgbClr val="1B1E26"/>
+          </a:solidFill>
+          <a:ln w="12700">
+            <a:solidFill>
+              <a:srgbClr val="2B2F3A"/>
+            </a:solidFill>
+            <a:prstDash val="solid"/>
+          </a:ln>
+        </p:spPr>
+      </p:sp>
+      <p:sp>
+        <p:nvSpPr>
+          <p:cNvPr id="20" name="Text 18"/>
+          <p:cNvSpPr/>
+          <p:nvPr/>
+        </p:nvSpPr>
+        <p:spPr>
+          <a:xfrm>
+            <a:off x="896112" y="4151376"/>
+            <a:ext cx="1371600" cy="274320"/>
+          </a:xfrm>
+          <a:prstGeom prst="rect">
+            <a:avLst/>
+          </a:prstGeom>
+          <a:noFill/>
+          <a:ln/>
+        </p:spPr>
+        <p:txBody>
+          <a:bodyPr wrap="square" lIns="0" tIns="0" rIns="0" bIns="0" rtlCol="0" anchor="t"/>
+          <a:lstStyle/>
+          <a:p>
+            <a:pPr indent="0" marL="0">
+              <a:buNone/>
+            </a:pPr>
+            <a:r>
+              <a:rPr lang="en-US" sz="1200" b="1" dirty="0">
+                <a:solidFill>
+                  <a:srgbClr val="818CF8"/>
+                </a:solidFill>
+                <a:latin typeface="Courier New" pitchFamily="34" charset="0"/>
+                <a:ea typeface="Courier New" pitchFamily="34" charset="-122"/>
+                <a:cs typeface="Courier New" pitchFamily="34" charset="-120"/>
+              </a:rPr>
+              <a:t>04</a:t>
+            </a:r>
+            <a:endParaRPr lang="en-US" sz="1200" dirty="0"/>
+          </a:p>
+        </p:txBody>
+      </p:sp>
+      <p:sp>
+        <p:nvSpPr>
+          <p:cNvPr id="21" name="Text 19"/>
+          <p:cNvSpPr/>
+          <p:nvPr/>
+        </p:nvSpPr>
+        <p:spPr>
+          <a:xfrm>
+            <a:off x="896112" y="4443984"/>
+            <a:ext cx="2880360" cy="292608"/>
+          </a:xfrm>
+          <a:prstGeom prst="rect">
+            <a:avLst/>
+          </a:prstGeom>
+          <a:noFill/>
+          <a:ln/>
+        </p:spPr>
+        <p:txBody>
+          <a:bodyPr wrap="square" lIns="0" tIns="0" rIns="0" bIns="0" rtlCol="0" anchor="t"/>
+          <a:lstStyle/>
+          <a:p>
+            <a:pPr indent="0" marL="0">
+              <a:buNone/>
+            </a:pPr>
+            <a:r>
+              <a:rPr lang="en-US" sz="1500" b="1" dirty="0">
+                <a:solidFill>
+                  <a:srgbClr val="F5F1EA"/>
+                </a:solidFill>
+                <a:latin typeface="Arial" pitchFamily="34" charset="0"/>
+                <a:ea typeface="Arial" pitchFamily="34" charset="-122"/>
+                <a:cs typeface="Arial" pitchFamily="34" charset="-120"/>
+              </a:rPr>
+              <a:t>THE TEST WAS WRONG</a:t>
+            </a:r>
+            <a:endParaRPr lang="en-US" sz="1500" dirty="0"/>
+          </a:p>
+        </p:txBody>
+      </p:sp>
+      <p:sp>
+        <p:nvSpPr>
+          <p:cNvPr id="22" name="Text 20"/>
+          <p:cNvSpPr/>
+          <p:nvPr/>
+        </p:nvSpPr>
+        <p:spPr>
+          <a:xfrm>
+            <a:off x="896112" y="4773168"/>
+            <a:ext cx="2880360" cy="329184"/>
+          </a:xfrm>
+          <a:prstGeom prst="rect">
+            <a:avLst/>
+          </a:prstGeom>
+          <a:noFill/>
+          <a:ln/>
+        </p:spPr>
+        <p:txBody>
+          <a:bodyPr wrap="square" lIns="0" tIns="0" rIns="0" bIns="0" rtlCol="0" anchor="t"/>
+          <a:lstStyle/>
+          <a:p>
+            <a:pPr indent="0" marL="0">
+              <a:buNone/>
+            </a:pPr>
+            <a:r>
+              <a:rPr lang="en-US" sz="1250" dirty="0">
+                <a:solidFill>
+                  <a:srgbClr val="F5F1EA"/>
+                </a:solidFill>
+                <a:latin typeface="Arial" pitchFamily="34" charset="0"/>
+                <a:ea typeface="Arial" pitchFamily="34" charset="-122"/>
+                <a:cs typeface="Arial" pitchFamily="34" charset="-120"/>
+              </a:rPr>
+              <a:t>Those 5 have no cases at all</a:t>
+            </a:r>
+            <a:endParaRPr lang="en-US" sz="1250" dirty="0"/>
+          </a:p>
+        </p:txBody>
+      </p:sp>
+      <p:sp>
+        <p:nvSpPr>
+          <p:cNvPr id="23" name="Text 21"/>
+          <p:cNvSpPr/>
+          <p:nvPr/>
+        </p:nvSpPr>
+        <p:spPr>
+          <a:xfrm>
+            <a:off x="896112" y="5138928"/>
+            <a:ext cx="2880360" cy="548640"/>
+          </a:xfrm>
+          <a:prstGeom prst="rect">
+            <a:avLst/>
+          </a:prstGeom>
+          <a:noFill/>
+          <a:ln/>
+        </p:spPr>
+        <p:txBody>
+          <a:bodyPr wrap="square" lIns="0" tIns="0" rIns="0" bIns="0" rtlCol="0" anchor="t"/>
+          <a:lstStyle/>
+          <a:p>
+            <a:pPr indent="0" marL="0">
+              <a:lnSpc>
+                <a:spcPts val="1500"/>
+              </a:lnSpc>
+              <a:buNone/>
+            </a:pPr>
+            <a:r>
+              <a:rPr lang="en-US" sz="1150" i="1" dirty="0">
+                <a:solidFill>
+                  <a:srgbClr val="9AA4B2"/>
+                </a:solidFill>
+                <a:latin typeface="Arial" pitchFamily="34" charset="0"/>
+                <a:ea typeface="Arial" pitchFamily="34" charset="-122"/>
+                <a:cs typeface="Arial" pitchFamily="34" charset="-120"/>
+              </a:rPr>
+              <a:t>Returning nothing was correct — our harness assumed otherwise</a:t>
+            </a:r>
+            <a:endParaRPr lang="en-US" sz="1150" dirty="0"/>
+          </a:p>
+        </p:txBody>
+      </p:sp>
+      <p:sp>
+        <p:nvSpPr>
+          <p:cNvPr id="24" name="Shape 22"/>
+          <p:cNvSpPr/>
+          <p:nvPr/>
+        </p:nvSpPr>
+        <p:spPr>
+          <a:xfrm>
+            <a:off x="4297680" y="4005072"/>
+            <a:ext cx="3383280" cy="1737360"/>
+          </a:xfrm>
+          <a:prstGeom prst="roundRect">
+            <a:avLst>
+              <a:gd name="adj" fmla="val 3158"/>
+            </a:avLst>
+          </a:prstGeom>
+          <a:solidFill>
+            <a:srgbClr val="1B1E26"/>
+          </a:solidFill>
+          <a:ln w="12700">
+            <a:solidFill>
+              <a:srgbClr val="2B2F3A"/>
+            </a:solidFill>
+            <a:prstDash val="solid"/>
+          </a:ln>
+        </p:spPr>
+      </p:sp>
+      <p:sp>
+        <p:nvSpPr>
+          <p:cNvPr id="25" name="Text 23"/>
+          <p:cNvSpPr/>
+          <p:nvPr/>
+        </p:nvSpPr>
+        <p:spPr>
+          <a:xfrm>
+            <a:off x="4553712" y="4151376"/>
+            <a:ext cx="1371600" cy="274320"/>
+          </a:xfrm>
+          <a:prstGeom prst="rect">
+            <a:avLst/>
+          </a:prstGeom>
+          <a:noFill/>
+          <a:ln/>
+        </p:spPr>
+        <p:txBody>
+          <a:bodyPr wrap="square" lIns="0" tIns="0" rIns="0" bIns="0" rtlCol="0" anchor="t"/>
+          <a:lstStyle/>
+          <a:p>
+            <a:pPr indent="0" marL="0">
+              <a:buNone/>
+            </a:pPr>
+            <a:r>
+              <a:rPr lang="en-US" sz="1200" b="1" dirty="0">
+                <a:solidFill>
+                  <a:srgbClr val="E0872F"/>
+                </a:solidFill>
+                <a:latin typeface="Courier New" pitchFamily="34" charset="0"/>
+                <a:ea typeface="Courier New" pitchFamily="34" charset="-122"/>
+                <a:cs typeface="Courier New" pitchFamily="34" charset="-120"/>
+              </a:rPr>
+              <a:t>05</a:t>
+            </a:r>
+            <a:endParaRPr lang="en-US" sz="1200" dirty="0"/>
+          </a:p>
+        </p:txBody>
+      </p:sp>
+      <p:sp>
+        <p:nvSpPr>
+          <p:cNvPr id="26" name="Text 24"/>
+          <p:cNvSpPr/>
+          <p:nvPr/>
+        </p:nvSpPr>
+        <p:spPr>
+          <a:xfrm>
+            <a:off x="4553712" y="4443984"/>
+            <a:ext cx="2880360" cy="292608"/>
+          </a:xfrm>
+          <a:prstGeom prst="rect">
+            <a:avLst/>
+          </a:prstGeom>
+          <a:noFill/>
+          <a:ln/>
+        </p:spPr>
+        <p:txBody>
+          <a:bodyPr wrap="square" lIns="0" tIns="0" rIns="0" bIns="0" rtlCol="0" anchor="t"/>
+          <a:lstStyle/>
+          <a:p>
+            <a:pPr indent="0" marL="0">
+              <a:buNone/>
+            </a:pPr>
+            <a:r>
+              <a:rPr lang="en-US" sz="1500" b="1" dirty="0">
+                <a:solidFill>
+                  <a:srgbClr val="F5F1EA"/>
+                </a:solidFill>
+                <a:latin typeface="Arial" pitchFamily="34" charset="0"/>
+                <a:ea typeface="Arial" pitchFamily="34" charset="-122"/>
+                <a:cs typeface="Arial" pitchFamily="34" charset="-120"/>
+              </a:rPr>
+              <a:t>THE REAL FIND</a:t>
+            </a:r>
+            <a:endParaRPr lang="en-US" sz="1500" dirty="0"/>
+          </a:p>
+        </p:txBody>
+      </p:sp>
+      <p:sp>
+        <p:nvSpPr>
+          <p:cNvPr id="27" name="Text 25"/>
+          <p:cNvSpPr/>
+          <p:nvPr/>
+        </p:nvSpPr>
+        <p:spPr>
+          <a:xfrm>
+            <a:off x="4553712" y="4773168"/>
+            <a:ext cx="2880360" cy="329184"/>
+          </a:xfrm>
+          <a:prstGeom prst="rect">
+            <a:avLst/>
+          </a:prstGeom>
+          <a:noFill/>
+          <a:ln/>
+        </p:spPr>
+        <p:txBody>
+          <a:bodyPr wrap="square" lIns="0" tIns="0" rIns="0" bIns="0" rtlCol="0" anchor="t"/>
+          <a:lstStyle/>
+          <a:p>
+            <a:pPr indent="0" marL="0">
+              <a:buNone/>
+            </a:pPr>
+            <a:r>
+              <a:rPr lang="en-US" sz="1250" dirty="0">
+                <a:solidFill>
+                  <a:srgbClr val="F5F1EA"/>
+                </a:solidFill>
+                <a:latin typeface="Arial" pitchFamily="34" charset="0"/>
+                <a:ea typeface="Arial" pitchFamily="34" charset="-122"/>
+                <a:cs typeface="Arial" pitchFamily="34" charset="-120"/>
+              </a:rPr>
+              <a:t>205 of 432 pairs hold no evidence</a:t>
+            </a:r>
+            <a:endParaRPr lang="en-US" sz="1250" dirty="0"/>
+          </a:p>
+        </p:txBody>
+      </p:sp>
+      <p:sp>
+        <p:nvSpPr>
+          <p:cNvPr id="28" name="Text 26"/>
+          <p:cNvSpPr/>
+          <p:nvPr/>
+        </p:nvSpPr>
+        <p:spPr>
+          <a:xfrm>
+            <a:off x="4553712" y="5138928"/>
+            <a:ext cx="2880360" cy="548640"/>
+          </a:xfrm>
+          <a:prstGeom prst="rect">
+            <a:avLst/>
+          </a:prstGeom>
+          <a:noFill/>
+          <a:ln/>
+        </p:spPr>
+        <p:txBody>
+          <a:bodyPr wrap="square" lIns="0" tIns="0" rIns="0" bIns="0" rtlCol="0" anchor="t"/>
+          <a:lstStyle/>
+          <a:p>
+            <a:pPr indent="0" marL="0">
+              <a:lnSpc>
+                <a:spcPts val="1500"/>
+              </a:lnSpc>
+              <a:buNone/>
+            </a:pPr>
+            <a:r>
+              <a:rPr lang="en-US" sz="1150" i="1" dirty="0">
+                <a:solidFill>
+                  <a:srgbClr val="9AA4B2"/>
+                </a:solidFill>
+                <a:latin typeface="Arial" pitchFamily="34" charset="0"/>
+                <a:ea typeface="Arial" pitchFamily="34" charset="-122"/>
+                <a:cs typeface="Arial" pitchFamily="34" charset="-120"/>
+              </a:rPr>
+              <a:t>Yet the banner announced “N real X Y deployments matched” for all of them</a:t>
+            </a:r>
+            <a:endParaRPr lang="en-US" sz="1150" dirty="0"/>
+          </a:p>
+        </p:txBody>
+      </p:sp>
+      <p:sp>
+        <p:nvSpPr>
+          <p:cNvPr id="191" name="QA 191"/>
+          <p:cNvSpPr/>
+          <p:nvPr/>
+        </p:nvSpPr>
+        <p:spPr>
+          <a:xfrm>
+            <a:off x="7955280" y="4005072"/>
+            <a:ext cx="3383280" cy="1737360"/>
+          </a:xfrm>
+          <a:prstGeom prst="roundRect">
+            <a:avLst>
+              <a:gd name="adj" fmla="val 3158"/>
+            </a:avLst>
+          </a:prstGeom>
+          <a:solidFill>
+            <a:srgbClr val="1B1E26"/>
+          </a:solidFill>
+          <a:ln w="12700">
+            <a:solidFill>
+              <a:srgbClr val="2B2F3A"/>
+            </a:solidFill>
+            <a:prstDash val="solid"/>
+          </a:ln>
+        </p:spPr>
+      </p:sp>
+      <p:sp>
+        <p:nvSpPr>
+          <p:cNvPr id="192" name="QA 192"/>
+          <p:cNvSpPr/>
+          <p:nvPr/>
+        </p:nvSpPr>
+        <p:spPr>
+          <a:xfrm>
+            <a:off x="8211312" y="4151376"/>
+            <a:ext cx="1371600" cy="274320"/>
+          </a:xfrm>
+          <a:prstGeom prst="rect">
+            <a:avLst/>
+          </a:prstGeom>
+          <a:noFill/>
+          <a:ln/>
+        </p:spPr>
+        <p:txBody>
+          <a:bodyPr wrap="square" lIns="0" tIns="0" rIns="0" bIns="0" rtlCol="0" anchor="t"/>
+          <a:lstStyle/>
+          <a:p>
+            <a:pPr indent="0" marL="0">
+              <a:buNone/>
+            </a:pPr>
+            <a:r>
+              <a:rPr lang="en-US" sz="1200" b="1" dirty="0">
+                <a:solidFill>
+                  <a:srgbClr val="818CF8"/>
+                </a:solidFill>
+                <a:latin typeface="Courier New" pitchFamily="34" charset="0"/>
+                <a:ea typeface="Courier New" pitchFamily="34" charset="-122"/>
+                <a:cs typeface="Courier New" pitchFamily="34" charset="-120"/>
+              </a:rPr>
+              <a:t>06</a:t>
+            </a:r>
+            <a:endParaRPr lang="en-US" sz="1200" dirty="0"/>
+          </a:p>
+        </p:txBody>
+      </p:sp>
+      <p:sp>
+        <p:nvSpPr>
+          <p:cNvPr id="193" name="QA 193"/>
+          <p:cNvSpPr/>
+          <p:nvPr/>
+        </p:nvSpPr>
+        <p:spPr>
+          <a:xfrm>
+            <a:off x="8211312" y="4443984"/>
+            <a:ext cx="2880360" cy="292608"/>
+          </a:xfrm>
+          <a:prstGeom prst="rect">
+            <a:avLst/>
+          </a:prstGeom>
+          <a:noFill/>
+          <a:ln/>
+        </p:spPr>
+        <p:txBody>
+          <a:bodyPr wrap="square" lIns="0" tIns="0" rIns="0" bIns="0" rtlCol="0" anchor="t"/>
+          <a:lstStyle/>
+          <a:p>
+            <a:pPr indent="0" marL="0">
+              <a:buNone/>
+            </a:pPr>
+            <a:r>
+              <a:rPr lang="en-US" sz="1500" b="1" dirty="0">
+                <a:solidFill>
+                  <a:srgbClr val="F5F1EA"/>
+                </a:solidFill>
+                <a:latin typeface="Arial" pitchFamily="34" charset="0"/>
+                <a:ea typeface="Arial" pitchFamily="34" charset="-122"/>
+                <a:cs typeface="Arial" pitchFamily="34" charset="-120"/>
+              </a:rPr>
+              <a:t>FIXED AND RE-RUN</a:t>
+            </a:r>
+            <a:endParaRPr lang="en-US" sz="1500" dirty="0"/>
+          </a:p>
+        </p:txBody>
+      </p:sp>
+      <p:sp>
+        <p:nvSpPr>
+          <p:cNvPr id="194" name="QA 194"/>
+          <p:cNvSpPr/>
+          <p:nvPr/>
+        </p:nvSpPr>
+        <p:spPr>
+          <a:xfrm>
+            <a:off x="8211312" y="4773168"/>
+            <a:ext cx="2880360" cy="329184"/>
+          </a:xfrm>
+          <a:prstGeom prst="rect">
+            <a:avLst/>
+          </a:prstGeom>
+          <a:noFill/>
+          <a:ln/>
+        </p:spPr>
+        <p:txBody>
+          <a:bodyPr wrap="square" lIns="0" tIns="0" rIns="0" bIns="0" rtlCol="0" anchor="t"/>
+          <a:lstStyle/>
+          <a:p>
+            <a:pPr indent="0" marL="0">
+              <a:buNone/>
+            </a:pPr>
+            <a:r>
+              <a:rPr lang="en-US" sz="1250" dirty="0">
+                <a:solidFill>
+                  <a:srgbClr val="F5F1EA"/>
+                </a:solidFill>
+                <a:latin typeface="Arial" pitchFamily="34" charset="0"/>
+                <a:ea typeface="Arial" pitchFamily="34" charset="-122"/>
+                <a:cs typeface="Arial" pitchFamily="34" charset="-120"/>
+              </a:rPr>
+              <a:t>The banner names what it is</a:t>
+            </a:r>
+            <a:endParaRPr lang="en-US" sz="1250" dirty="0"/>
+          </a:p>
+        </p:txBody>
+      </p:sp>
+      <p:sp>
+        <p:nvSpPr>
+          <p:cNvPr id="195" name="QA 195"/>
+          <p:cNvSpPr/>
+          <p:nvPr/>
+        </p:nvSpPr>
+        <p:spPr>
+          <a:xfrm>
+            <a:off x="8211312" y="5138928"/>
+            <a:ext cx="2880360" cy="548640"/>
+          </a:xfrm>
+          <a:prstGeom prst="rect">
+            <a:avLst/>
+          </a:prstGeom>
+          <a:noFill/>
+          <a:ln/>
+        </p:spPr>
+        <p:txBody>
+          <a:bodyPr wrap="square" lIns="0" tIns="0" rIns="0" bIns="0" rtlCol="0" anchor="t"/>
+          <a:lstStyle/>
+          <a:p>
+            <a:pPr indent="0" marL="0">
+              <a:lnSpc>
+                <a:spcPts val="1500"/>
+              </a:lnSpc>
+              <a:buNone/>
+            </a:pPr>
+            <a:r>
+              <a:rPr lang="en-US" sz="1150" i="1" dirty="0">
+                <a:solidFill>
+                  <a:srgbClr val="9AA4B2"/>
+                </a:solidFill>
+                <a:latin typeface="Arial" pitchFamily="34" charset="0"/>
+                <a:ea typeface="Arial" pitchFamily="34" charset="-122"/>
+                <a:cs typeface="Arial" pitchFamily="34" charset="-120"/>
+              </a:rPr>
+              <a:t>Real matches and nearest-comparable labelled apart; sweep now passes</a:t>
+            </a:r>
+            <a:endParaRPr lang="en-US" sz="1150" dirty="0"/>
+          </a:p>
+        </p:txBody>
+      </p:sp>
+      <p:sp>
+        <p:nvSpPr>
+          <p:cNvPr id="29" name="Text 27"/>
+          <p:cNvSpPr/>
+          <p:nvPr/>
+        </p:nvSpPr>
+        <p:spPr>
+          <a:xfrm>
+            <a:off x="640080" y="5870448"/>
+            <a:ext cx="10881360" cy="411480"/>
+          </a:xfrm>
+          <a:prstGeom prst="rect">
+            <a:avLst/>
+          </a:prstGeom>
+          <a:noFill/>
+          <a:ln/>
+        </p:spPr>
+        <p:txBody>
+          <a:bodyPr wrap="square" lIns="0" tIns="0" rIns="0" bIns="0" rtlCol="0" anchor="t"/>
+          <a:lstStyle/>
+          <a:p>
+            <a:pPr indent="0" marL="0">
+              <a:buNone/>
+            </a:pPr>
+            <a:r>
+              <a:rPr lang="en-US" sz="1400" b="1" dirty="0">
+                <a:solidFill>
+                  <a:srgbClr val="5FB39C"/>
+                </a:solidFill>
+                <a:latin typeface="Arial" pitchFamily="34" charset="0"/>
+                <a:ea typeface="Arial" pitchFamily="34" charset="-122"/>
+                <a:cs typeface="Arial" pitchFamily="34" charset="-120"/>
+              </a:rPr>
+              <a:t>The bug was in our own test, not the product — and chasing it exposed a claim false for 47% of queries.</a:t>
+            </a:r>
+            <a:endParaRPr lang="en-US" sz="1400" dirty="0"/>
+          </a:p>
+        </p:txBody>
+      </p:sp>
+      <p:sp>
+        <p:nvSpPr>
+          <p:cNvPr id="30" name="Text 28"/>
+          <p:cNvSpPr/>
+          <p:nvPr/>
+        </p:nvSpPr>
+        <p:spPr>
+          <a:xfrm>
+            <a:off x="640080" y="6382512"/>
+            <a:ext cx="10881360" cy="274320"/>
+          </a:xfrm>
+          <a:prstGeom prst="rect">
+            <a:avLst/>
+          </a:prstGeom>
+          <a:noFill/>
+          <a:ln/>
+        </p:spPr>
+        <p:txBody>
+          <a:bodyPr wrap="square" lIns="0" tIns="0" rIns="0" bIns="0" rtlCol="0" anchor="t"/>
+          <a:lstStyle/>
+          <a:p>
+            <a:pPr indent="0" marL="0">
+              <a:buNone/>
+            </a:pPr>
+            <a:r>
+              <a:rPr lang="en-US" sz="900" dirty="0">
+                <a:solidFill>
+                  <a:srgbClr val="9AA4B2"/>
+                </a:solidFill>
+                <a:latin typeface="Courier New" pitchFamily="34" charset="0"/>
+                <a:ea typeface="Courier New" pitchFamily="34" charset="-122"/>
+                <a:cs typeface="Courier New" pitchFamily="34" charset="-120"/>
+              </a:rPr>
+              <a:t>tests/distancecheck.py --full  ·  432 of 432 combinations swept  ·  0 pairs with evidence returning nothing  ·  dated in Build Guide 35</a:t>
+            </a:r>
+            <a:endParaRPr lang="en-US" sz="900" dirty="0"/>
           </a:p>
         </p:txBody>
       </p:sp>
@@ -4616,6 +6033,43 @@
           </a:p>
         </p:txBody>
       </p:sp>
+      <p:sp>
+        <p:nvSpPr>
+          <p:cNvPr id="180" name="Text 18"/>
+          <p:cNvSpPr/>
+          <p:nvPr/>
+        </p:nvSpPr>
+        <p:spPr>
+          <a:xfrm>
+            <a:off x="8001000" y="6126480"/>
+            <a:ext cx="3520440" cy="274320"/>
+          </a:xfrm>
+          <a:prstGeom prst="rect">
+            <a:avLst/>
+          </a:prstGeom>
+          <a:noFill/>
+          <a:ln/>
+        </p:spPr>
+        <p:txBody>
+          <a:bodyPr wrap="square" lIns="0" tIns="0" rIns="0" bIns="0" rtlCol="0" anchor="t"/>
+          <a:lstStyle/>
+          <a:p>
+            <a:pPr indent="0" marL="0">
+              <a:buNone/>
+            </a:pPr>
+            <a:r>
+              <a:rPr lang="en-US" sz="900" i="1" dirty="0">
+                <a:solidFill>
+                  <a:srgbClr val="9AA4B2"/>
+                </a:solidFill>
+                <a:latin typeface="Arial" pitchFamily="34" charset="0"/>
+              </a:rPr>
+              <a:t>Exports as Markdown, JSON or PDF.</a:t>
+            </a:r>
+            <a:endParaRPr lang="en-US" sz="900" dirty="0"/>
+          </a:p>
+        </p:txBody>
+      </p:sp>
     </p:spTree>
   </p:cSld>
   <p:clrMapOvr>
@@ -5014,7 +6468,7 @@
                 <a:ea typeface="Arial" pitchFamily="34" charset="-122"/>
                 <a:cs typeface="Arial" pitchFamily="34" charset="-120"/>
               </a:rPr>
-              <a:t>FILTER</a:t>
+              <a:t>GATE ON RELEVANCE</a:t>
             </a:r>
             <a:endParaRPr lang="en-US" sz="1500" dirty="0"/>
           </a:p>
@@ -5053,7 +6507,7 @@
                 <a:ea typeface="Arial" pitchFamily="34" charset="-122"/>
                 <a:cs typeface="Arial" pitchFamily="34" charset="-120"/>
               </a:rPr>
-              <a:t>Privacy posture, as a hard rule</a:t>
+              <a:t>Drop cases past the cutoff</a:t>
             </a:r>
             <a:endParaRPr lang="en-US" sz="1250" dirty="0"/>
           </a:p>
@@ -5095,7 +6549,7 @@
                 <a:ea typeface="Arial" pitchFamily="34" charset="-122"/>
                 <a:cs typeface="Arial" pitchFamily="34" charset="-120"/>
               </a:rPr>
-              <a:t>Filter before ranking, so compliance is code — not a model guess</a:t>
+              <a:t>If nothing clears it the run stops — the model never summarises no evidence</a:t>
             </a:r>
             <a:endParaRPr lang="en-US" sz="1150" dirty="0"/>
           </a:p>
@@ -5200,7 +6654,7 @@
                 <a:ea typeface="Arial" pitchFamily="34" charset="-122"/>
                 <a:cs typeface="Arial" pitchFamily="34" charset="-120"/>
               </a:rPr>
-              <a:t>RANK</a:t>
+              <a:t>FILTER</a:t>
             </a:r>
             <a:endParaRPr lang="en-US" sz="1500" dirty="0"/>
           </a:p>
@@ -5239,7 +6693,7 @@
                 <a:ea typeface="Arial" pitchFamily="34" charset="-122"/>
                 <a:cs typeface="Arial" pitchFamily="34" charset="-120"/>
               </a:rPr>
-              <a:t>Frequency over the matched cases</a:t>
+              <a:t>Privacy posture, as a hard rule</a:t>
             </a:r>
             <a:endParaRPr lang="en-US" sz="1250" dirty="0"/>
           </a:p>
@@ -5281,7 +6735,7 @@
                 <a:ea typeface="Arial" pitchFamily="34" charset="-122"/>
                 <a:cs typeface="Arial" pitchFamily="34" charset="-120"/>
               </a:rPr>
-              <a:t>Plain counting: no hand-picked winners, no weighting</a:t>
+              <a:t>Filter before ranking, so compliance is code — not a model guess</a:t>
             </a:r>
             <a:endParaRPr lang="en-US" sz="1150" dirty="0"/>
           </a:p>
@@ -5386,7 +6840,7 @@
                 <a:ea typeface="Arial" pitchFamily="34" charset="-122"/>
                 <a:cs typeface="Arial" pitchFamily="34" charset="-120"/>
               </a:rPr>
-              <a:t>PRICE</a:t>
+              <a:t>RANK</a:t>
             </a:r>
             <a:endParaRPr lang="en-US" sz="1500" dirty="0"/>
           </a:p>
@@ -5425,7 +6879,7 @@
                 <a:ea typeface="Arial" pitchFamily="34" charset="-122"/>
                 <a:cs typeface="Arial" pitchFamily="34" charset="-120"/>
               </a:rPr>
-              <a:t>Token / seat / usage models</a:t>
+              <a:t>Frequency over the matched cases</a:t>
             </a:r>
             <a:endParaRPr lang="en-US" sz="1250" dirty="0"/>
           </a:p>
@@ -5467,7 +6921,7 @@
                 <a:ea typeface="Arial" pitchFamily="34" charset="-122"/>
                 <a:cs typeface="Arial" pitchFamily="34" charset="-120"/>
               </a:rPr>
-              <a:t>Priced by billing model, flagged against your budget</a:t>
+              <a:t>Plain counting: no hand-picked winners, no weighting</a:t>
             </a:r>
             <a:endParaRPr lang="en-US" sz="1150" dirty="0"/>
           </a:p>
@@ -5527,7 +6981,7 @@
             <a:r>
               <a:rPr lang="en-US" sz="1200" b="1" dirty="0">
                 <a:solidFill>
-                  <a:srgbClr val="E0872F"/>
+                  <a:srgbClr val="818CF8"/>
                 </a:solidFill>
                 <a:latin typeface="Courier New" pitchFamily="34" charset="0"/>
                 <a:ea typeface="Courier New" pitchFamily="34" charset="-122"/>
@@ -5572,7 +7026,7 @@
                 <a:ea typeface="Arial" pitchFamily="34" charset="-122"/>
                 <a:cs typeface="Arial" pitchFamily="34" charset="-120"/>
               </a:rPr>
-              <a:t>SUMMARISE</a:t>
+              <a:t>PRICE</a:t>
             </a:r>
             <a:endParaRPr lang="en-US" sz="1500" dirty="0"/>
           </a:p>
@@ -5611,6 +7065,150 @@
                 <a:ea typeface="Arial" pitchFamily="34" charset="-122"/>
                 <a:cs typeface="Arial" pitchFamily="34" charset="-120"/>
               </a:rPr>
+              <a:t>Token / seat / usage models</a:t>
+            </a:r>
+            <a:endParaRPr lang="en-US" sz="1250" dirty="0"/>
+          </a:p>
+        </p:txBody>
+      </p:sp>
+      <p:sp>
+        <p:nvSpPr>
+          <p:cNvPr id="91" name="Clone 91"/>
+          <p:cNvSpPr/>
+          <p:nvPr/>
+        </p:nvSpPr>
+        <p:spPr>
+          <a:xfrm>
+            <a:off x="7955280" y="4005072"/>
+            <a:ext cx="3383280" cy="1737360"/>
+          </a:xfrm>
+          <a:prstGeom prst="roundRect">
+            <a:avLst>
+              <a:gd name="adj" fmla="val 3158"/>
+            </a:avLst>
+          </a:prstGeom>
+          <a:solidFill>
+            <a:srgbClr val="1B1E26"/>
+          </a:solidFill>
+          <a:ln w="12700">
+            <a:solidFill>
+              <a:srgbClr val="2B2F3A"/>
+            </a:solidFill>
+            <a:prstDash val="solid"/>
+          </a:ln>
+        </p:spPr>
+      </p:sp>
+      <p:sp>
+        <p:nvSpPr>
+          <p:cNvPr id="92" name="Clone 92"/>
+          <p:cNvSpPr/>
+          <p:nvPr/>
+        </p:nvSpPr>
+        <p:spPr>
+          <a:xfrm>
+            <a:off x="8211312" y="4151376"/>
+            <a:ext cx="1371600" cy="274320"/>
+          </a:xfrm>
+          <a:prstGeom prst="rect">
+            <a:avLst/>
+          </a:prstGeom>
+          <a:noFill/>
+          <a:ln/>
+        </p:spPr>
+        <p:txBody>
+          <a:bodyPr wrap="square" lIns="0" tIns="0" rIns="0" bIns="0" rtlCol="0" anchor="t"/>
+          <a:lstStyle/>
+          <a:p>
+            <a:pPr indent="0" marL="0">
+              <a:buNone/>
+            </a:pPr>
+            <a:r>
+              <a:rPr lang="en-US" sz="1200" b="1" dirty="0">
+                <a:solidFill>
+                  <a:srgbClr val="E0872F"/>
+                </a:solidFill>
+                <a:latin typeface="Courier New" pitchFamily="34" charset="0"/>
+                <a:ea typeface="Courier New" pitchFamily="34" charset="-122"/>
+                <a:cs typeface="Courier New" pitchFamily="34" charset="-120"/>
+              </a:rPr>
+              <a:t>06</a:t>
+            </a:r>
+            <a:endParaRPr lang="en-US" sz="1200" dirty="0"/>
+          </a:p>
+        </p:txBody>
+      </p:sp>
+      <p:sp>
+        <p:nvSpPr>
+          <p:cNvPr id="93" name="Clone 93"/>
+          <p:cNvSpPr/>
+          <p:nvPr/>
+        </p:nvSpPr>
+        <p:spPr>
+          <a:xfrm>
+            <a:off x="8211312" y="4443984"/>
+            <a:ext cx="2880360" cy="292608"/>
+          </a:xfrm>
+          <a:prstGeom prst="rect">
+            <a:avLst/>
+          </a:prstGeom>
+          <a:noFill/>
+          <a:ln/>
+        </p:spPr>
+        <p:txBody>
+          <a:bodyPr wrap="square" lIns="0" tIns="0" rIns="0" bIns="0" rtlCol="0" anchor="t"/>
+          <a:lstStyle/>
+          <a:p>
+            <a:pPr indent="0" marL="0">
+              <a:buNone/>
+            </a:pPr>
+            <a:r>
+              <a:rPr lang="en-US" sz="1500" b="1" dirty="0">
+                <a:solidFill>
+                  <a:srgbClr val="F5F1EA"/>
+                </a:solidFill>
+                <a:latin typeface="Arial" pitchFamily="34" charset="0"/>
+                <a:ea typeface="Arial" pitchFamily="34" charset="-122"/>
+                <a:cs typeface="Arial" pitchFamily="34" charset="-120"/>
+              </a:rPr>
+              <a:t>SUMMARISE</a:t>
+            </a:r>
+            <a:endParaRPr lang="en-US" sz="1500" dirty="0"/>
+          </a:p>
+        </p:txBody>
+      </p:sp>
+      <p:sp>
+        <p:nvSpPr>
+          <p:cNvPr id="94" name="Clone 94"/>
+          <p:cNvSpPr/>
+          <p:nvPr/>
+        </p:nvSpPr>
+        <p:spPr>
+          <a:xfrm>
+            <a:off x="8211312" y="4773168"/>
+            <a:ext cx="2880360" cy="329184"/>
+          </a:xfrm>
+          <a:prstGeom prst="rect">
+            <a:avLst/>
+          </a:prstGeom>
+          <a:noFill/>
+          <a:ln/>
+        </p:spPr>
+        <p:txBody>
+          <a:bodyPr wrap="square" lIns="0" tIns="0" rIns="0" bIns="0" rtlCol="0" anchor="t"/>
+          <a:lstStyle/>
+          <a:p>
+            <a:pPr indent="0" marL="0">
+              <a:buNone/>
+            </a:pPr>
+            <a:r>
+              <a:rPr lang="en-US" sz="1250" dirty="0">
+                <a:solidFill>
+                  <a:srgbClr val="F5F1EA"/>
+                </a:solidFill>
+                <a:latin typeface="Arial" pitchFamily="34" charset="0"/>
+                <a:ea typeface="Arial" pitchFamily="34" charset="-122"/>
+                <a:cs typeface="Arial" pitchFamily="34" charset="-120"/>
+              </a:rPr>
               <a:t>The LLM writes the paragraph</a:t>
             </a:r>
             <a:endParaRPr lang="en-US" sz="1250" dirty="0"/>
@@ -5619,13 +7217,13 @@
       </p:sp>
       <p:sp>
         <p:nvSpPr>
-          <p:cNvPr id="28" name="Text 26"/>
-          <p:cNvSpPr/>
-          <p:nvPr/>
-        </p:nvSpPr>
-        <p:spPr>
-          <a:xfrm>
-            <a:off x="4553712" y="5138928"/>
+          <p:cNvPr id="95" name="Clone 95"/>
+          <p:cNvSpPr/>
+          <p:nvPr/>
+        </p:nvSpPr>
+        <p:spPr>
+          <a:xfrm>
+            <a:off x="8211312" y="5138928"/>
             <a:ext cx="2880360" cy="548640"/>
           </a:xfrm>
           <a:prstGeom prst="rect">
@@ -5661,37 +7259,79 @@
       </p:sp>
       <p:sp>
         <p:nvSpPr>
-          <p:cNvPr id="29" name="Text 27"/>
-          <p:cNvSpPr/>
-          <p:nvPr/>
-        </p:nvSpPr>
-        <p:spPr>
-          <a:xfrm>
-            <a:off x="640080" y="5870448"/>
-            <a:ext cx="10881360" cy="411480"/>
-          </a:xfrm>
-          <a:prstGeom prst="rect">
-            <a:avLst/>
-          </a:prstGeom>
-          <a:noFill/>
-          <a:ln/>
-        </p:spPr>
-        <p:txBody>
-          <a:bodyPr wrap="square" lIns="0" tIns="0" rIns="0" bIns="0" rtlCol="0" anchor="t"/>
-          <a:lstStyle/>
-          <a:p>
-            <a:pPr indent="0" marL="0">
-              <a:buNone/>
-            </a:pPr>
-            <a:r>
-              <a:rPr lang="en-US" sz="1400" b="1" dirty="0">
-                <a:solidFill>
-                  <a:srgbClr val="5FB39C"/>
+          <p:cNvPr id="28" name="Text 26"/>
+          <p:cNvSpPr/>
+          <p:nvPr/>
+        </p:nvSpPr>
+        <p:spPr>
+          <a:xfrm>
+            <a:off x="4553712" y="5138928"/>
+            <a:ext cx="2880360" cy="548640"/>
+          </a:xfrm>
+          <a:prstGeom prst="rect">
+            <a:avLst/>
+          </a:prstGeom>
+          <a:noFill/>
+          <a:ln/>
+        </p:spPr>
+        <p:txBody>
+          <a:bodyPr wrap="square" lIns="0" tIns="0" rIns="0" bIns="0" rtlCol="0" anchor="t"/>
+          <a:lstStyle/>
+          <a:p>
+            <a:pPr indent="0" marL="0">
+              <a:lnSpc>
+                <a:spcPts val="1500"/>
+              </a:lnSpc>
+              <a:buNone/>
+            </a:pPr>
+            <a:r>
+              <a:rPr lang="en-US" sz="1150" i="1" dirty="0">
+                <a:solidFill>
+                  <a:srgbClr val="9AA4B2"/>
                 </a:solidFill>
                 <a:latin typeface="Arial" pitchFamily="34" charset="0"/>
                 <a:ea typeface="Arial" pitchFamily="34" charset="-122"/>
                 <a:cs typeface="Arial" pitchFamily="34" charset="-120"/>
               </a:rPr>
+              <a:t>Priced by billing model, flagged against your budget</a:t>
+            </a:r>
+            <a:endParaRPr lang="en-US" sz="1150" dirty="0"/>
+          </a:p>
+        </p:txBody>
+      </p:sp>
+      <p:sp>
+        <p:nvSpPr>
+          <p:cNvPr id="29" name="Text 27"/>
+          <p:cNvSpPr/>
+          <p:nvPr/>
+        </p:nvSpPr>
+        <p:spPr>
+          <a:xfrm>
+            <a:off x="640080" y="5870448"/>
+            <a:ext cx="10881360" cy="411480"/>
+          </a:xfrm>
+          <a:prstGeom prst="rect">
+            <a:avLst/>
+          </a:prstGeom>
+          <a:noFill/>
+          <a:ln/>
+        </p:spPr>
+        <p:txBody>
+          <a:bodyPr wrap="square" lIns="0" tIns="0" rIns="0" bIns="0" rtlCol="0" anchor="t"/>
+          <a:lstStyle/>
+          <a:p>
+            <a:pPr indent="0" marL="0">
+              <a:buNone/>
+            </a:pPr>
+            <a:r>
+              <a:rPr lang="en-US" sz="1400" b="1" dirty="0">
+                <a:solidFill>
+                  <a:srgbClr val="5FB39C"/>
+                </a:solidFill>
+                <a:latin typeface="Arial" pitchFamily="34" charset="0"/>
+                <a:ea typeface="Arial" pitchFamily="34" charset="-122"/>
+                <a:cs typeface="Arial" pitchFamily="34" charset="-120"/>
+              </a:rPr>
               <a:t>The LLM is the last and smallest step. By the time it runs, the tools and the prices are already decided by deterministic Python.</a:t>
             </a:r>
             <a:endParaRPr lang="en-US" sz="1400" dirty="0"/>
@@ -5731,7 +7371,7 @@
                 <a:ea typeface="Courier New" pitchFamily="34" charset="-122"/>
                 <a:cs typeface="Courier New" pitchFamily="34" charset="-120"/>
               </a:rPr>
-              <a:t>Chroma + all-MiniLM-L6-v2  ·  88.7% of cases resolve to a canonical tool  ·  ranking = collections.Counter, verified in code</a:t>
+              <a:t>Chroma + all-MiniLM-L6-v2  ·  88.7% of cases resolve to a canonical tool  ·  relevance cutoff verified across all 432 input combinations</a:t>
             </a:r>
             <a:endParaRPr lang="en-US" sz="900" dirty="0"/>
           </a:p>
@@ -5844,7 +7484,7 @@
                 <a:ea typeface="Arial" pitchFamily="34" charset="-122"/>
                 <a:cs typeface="Arial" pitchFamily="34" charset="-120"/>
               </a:rPr>
-              <a:t>Real testers. Honest numbers. Intervals included.</a:t>
+              <a:t>Eight real testers. All four targets met — and what that does not prove.</a:t>
             </a:r>
             <a:endParaRPr lang="en-US" sz="3400" dirty="0"/>
           </a:p>
@@ -6375,7 +8015,7 @@
                           <a:ea typeface="Arial" pitchFamily="34" charset="-122"/>
                           <a:cs typeface="Arial" pitchFamily="34" charset="-120"/>
                         </a:rPr>
-                        <a:t>80% (4/5)</a:t>
+                        <a:t>100% (8/8)</a:t>
                       </a:r>
                       <a:endParaRPr lang="en-US" sz="1200" dirty="0">
                         <a:latin typeface="Arial" charset="0"/>
@@ -6443,7 +8083,7 @@
                           <a:ea typeface="Arial" pitchFamily="34" charset="-122"/>
                           <a:cs typeface="Arial" pitchFamily="34" charset="-120"/>
                         </a:rPr>
-                        <a:t>42% – 94%</a:t>
+                        <a:t>72% – 99%</a:t>
                       </a:r>
                       <a:endParaRPr lang="en-US" sz="1200" dirty="0">
                         <a:latin typeface="Arial" charset="0"/>
@@ -6511,7 +8151,7 @@
                           <a:ea typeface="Arial" pitchFamily="34" charset="-122"/>
                           <a:cs typeface="Arial" pitchFamily="34" charset="-120"/>
                         </a:rPr>
-                        <a:t>Yes*</a:t>
+                        <a:t>Yes</a:t>
                       </a:r>
                       <a:endParaRPr lang="en-US" sz="1200" dirty="0">
                         <a:latin typeface="Arial" charset="0"/>
@@ -6717,7 +8357,7 @@
                           <a:ea typeface="Arial" pitchFamily="34" charset="-122"/>
                           <a:cs typeface="Arial" pitchFamily="34" charset="-120"/>
                         </a:rPr>
-                        <a:t>50% (7/14)</a:t>
+                        <a:t>83% (10/12)</a:t>
                       </a:r>
                       <a:endParaRPr lang="en-US" sz="1200" dirty="0">
                         <a:latin typeface="Arial" charset="0"/>
@@ -6785,7 +8425,7 @@
                           <a:ea typeface="Arial" pitchFamily="34" charset="-122"/>
                           <a:cs typeface="Arial" pitchFamily="34" charset="-120"/>
                         </a:rPr>
-                        <a:t>30% – 70%</a:t>
+                        <a:t>59% – 93%</a:t>
                       </a:r>
                       <a:endParaRPr lang="en-US" sz="1200" dirty="0">
                         <a:latin typeface="Arial" charset="0"/>
@@ -6853,7 +8493,7 @@
                           <a:ea typeface="Arial" pitchFamily="34" charset="-122"/>
                           <a:cs typeface="Arial" pitchFamily="34" charset="-120"/>
                         </a:rPr>
-                        <a:t>Yes*</a:t>
+                        <a:t>Yes</a:t>
                       </a:r>
                       <a:endParaRPr lang="en-US" sz="1200" dirty="0">
                         <a:latin typeface="Arial" charset="0"/>
@@ -7401,7 +9041,7 @@
                           <a:ea typeface="Arial" pitchFamily="34" charset="-122"/>
                           <a:cs typeface="Arial" pitchFamily="34" charset="-120"/>
                         </a:rPr>
-                        <a:t>3/5</a:t>
+                        <a:t>5/5</a:t>
                       </a:r>
                       <a:endParaRPr lang="en-US" sz="1200" dirty="0">
                         <a:latin typeface="Arial" charset="0"/>
@@ -7537,7 +9177,7 @@
                           <a:ea typeface="Arial" pitchFamily="34" charset="-122"/>
                           <a:cs typeface="Arial" pitchFamily="34" charset="-120"/>
                         </a:rPr>
-                        <a:t>No</a:t>
+                        <a:t>Yes</a:t>
                       </a:r>
                       <a:endParaRPr lang="en-US" sz="1200" dirty="0">
                         <a:latin typeface="Arial" charset="0"/>
@@ -7743,7 +9383,7 @@
                           <a:ea typeface="Arial" pitchFamily="34" charset="-122"/>
                           <a:cs typeface="Arial" pitchFamily="34" charset="-120"/>
                         </a:rPr>
-                        <a:t>1.51s (14 calls)</a:t>
+                        <a:t>1.34s (12 calls)</a:t>
                       </a:r>
                       <a:endParaRPr lang="en-US" sz="1200" dirty="0">
                         <a:latin typeface="Arial" charset="0"/>
@@ -7811,7 +9451,7 @@
                           <a:ea typeface="Arial" pitchFamily="34" charset="-122"/>
                           <a:cs typeface="Arial" pitchFamily="34" charset="-120"/>
                         </a:rPr>
-                        <a:t>min 0.82 / max 3.29</a:t>
+                        <a:t>min 0.57 / max 2.62</a:t>
                       </a:r>
                       <a:endParaRPr lang="en-US" sz="1200" dirty="0">
                         <a:latin typeface="Arial" charset="0"/>
@@ -7943,8 +9583,8 @@
         </p:nvSpPr>
         <p:spPr>
           <a:xfrm>
-            <a:off x="640080" y="4800600"/>
-            <a:ext cx="10881360" cy="274320"/>
+            <a:off x="640080" y="4526280"/>
+            <a:ext cx="10881360" cy="548640"/>
           </a:xfrm>
           <a:prstGeom prst="rect">
             <a:avLst/>
@@ -7968,7 +9608,7 @@
                 <a:ea typeface="Arial" pitchFamily="34" charset="-122"/>
                 <a:cs typeface="Arial" pitchFamily="34" charset="-120"/>
               </a:rPr>
-              <a:t>* point estimate meets the target; the interval overlaps it. At n=5 one person changing their answer moves the rate ~20 points.</a:t>
+              <a:t>At n=8 one changed answer moves a rate 12.5 points — read the intervals, not the point estimates. Trust was 3/5 in the earlier round; the build and the participants both changed, so this is no measured before/after.</a:t>
             </a:r>
             <a:endParaRPr lang="en-US" sz="1100" dirty="0"/>
           </a:p>
@@ -8048,7 +9688,7 @@
                 <a:ea typeface="Arial" pitchFamily="34" charset="-122"/>
                 <a:cs typeface="Arial" pitchFamily="34" charset="-120"/>
               </a:rPr>
-              <a:t>14 viewed a blueprint  →  7 exported it (50% of viewers)  →  5 answered the survey, 4 said it saved them research time (80%)</a:t>
+              <a:t>12 viewed a blueprint  →  10 exported it (83% of viewers)  →  8 answered the survey, 8 said it saved them research time (100%)</a:t>
             </a:r>
             <a:endParaRPr lang="en-US" sz="1100" dirty="0"/>
           </a:p>
@@ -8087,7 +9727,7 @@
                 <a:ea typeface="Arial" pitchFamily="34" charset="-122"/>
                 <a:cs typeface="Arial" pitchFamily="34" charset="-120"/>
               </a:rPr>
-              <a:t>Read as a sequence, not three independent statistics. 14 sessions ≠ 14 distinct people — telemetry has no user identifier, by design.</a:t>
+              <a:t>8 participants at 7 real companies · 5 non-native English speakers · 5 chose the regulated posture · all recruited via our own networks (convenience sample)</a:t>
             </a:r>
             <a:endParaRPr lang="en-US" sz="1100" dirty="0"/>
           </a:p>
@@ -8762,7 +10402,7 @@
                 <a:ea typeface="Courier New" pitchFamily="34" charset="-122"/>
                 <a:cs typeface="Courier New" pitchFamily="34" charset="-120"/>
               </a:rPr>
-              <a:t>07 · ETHICS &amp; DATA MINIMISATION</a:t>
+              <a:t>08 · ETHICS &amp; DATA MINIMISATION</a:t>
             </a:r>
             <a:endParaRPr lang="en-US" sz="1100" dirty="0"/>
           </a:p>
@@ -9344,7 +10984,7 @@
                 <a:ea typeface="Arial" pitchFamily="34" charset="-122"/>
                 <a:cs typeface="Arial" pitchFamily="34" charset="-120"/>
               </a:rPr>
-              <a:t>No testimonials, badges, user counts or logos. There are none, so we show none.</a:t>
+              <a:t>No testimonials, badges, user counts or logos. There are none, so we show none. When our own QA claim proved wrong, we corrected it in writing rather than deleting it.</a:t>
             </a:r>
             <a:endParaRPr lang="en-US" sz="1150" dirty="0"/>
           </a:p>
@@ -9562,7 +11202,7 @@
                 <a:ea typeface="Courier New" pitchFamily="34" charset="-122"/>
                 <a:cs typeface="Courier New" pitchFamily="34" charset="-120"/>
               </a:rPr>
-              <a:t>08 · KNOWN LIMITATIONS &amp; ROADMAP</a:t>
+              <a:t>09 · KNOWN LIMITATIONS &amp; ROADMAP</a:t>
             </a:r>
             <a:endParaRPr lang="en-US" sz="1100" dirty="0"/>
           </a:p>
@@ -9626,7 +11266,7 @@
         </p:nvGraphicFramePr>
         <p:xfrm>
           <a:off x="640080" y="2194560"/>
-          <a:ext cx="10881360" cy="914400"/>
+          <a:ext cx="10881360" cy="1280160"/>
         </p:xfrm>
         <a:graphic>
           <a:graphicData uri="http://schemas.openxmlformats.org/drawingml/2006/table">
@@ -10685,7 +12325,7 @@
                           <a:ea typeface="Arial" pitchFamily="34" charset="-122"/>
                           <a:cs typeface="Arial" pitchFamily="34" charset="-120"/>
                         </a:rPr>
-                        <a:t>Validation sample is small (n=5)</a:t>
+                        <a:t>Validation sample is small (n=8)</a:t>
                       </a:r>
                       <a:endParaRPr lang="en-US" sz="1150" dirty="0">
                         <a:latin typeface="Arial" charset="0"/>
@@ -10753,7 +12393,7 @@
                           <a:ea typeface="Arial" pitchFamily="34" charset="-122"/>
                           <a:cs typeface="Arial" pitchFamily="34" charset="-120"/>
                         </a:rPr>
-                        <a:t>Realistic for 2 people in 4 weeks</a:t>
+                        <a:t>8 testers, all our own contacts</a:t>
                       </a:r>
                       <a:endParaRPr lang="en-US" sz="1150" dirty="0">
                         <a:latin typeface="Arial" charset="0"/>
@@ -10821,7 +12461,7 @@
                           <a:ea typeface="Arial" pitchFamily="34" charset="-122"/>
                           <a:cs typeface="Arial" pitchFamily="34" charset="-120"/>
                         </a:rPr>
-                        <a:t>Larger N; intervals reported</a:t>
+                        <a:t>Larger, neutral N; intervals reported</a:t>
                       </a:r>
                       <a:endParaRPr lang="en-US" sz="1150" dirty="0">
                         <a:latin typeface="Arial" charset="0"/>
@@ -11028,6 +12668,212 @@
                           <a:cs typeface="Arial" pitchFamily="34" charset="-120"/>
                         </a:rPr>
                         <a:t>Responsive pass before release</a:t>
+                      </a:r>
+                      <a:endParaRPr lang="en-US" sz="1150" dirty="0">
+                        <a:latin typeface="Arial" charset="0"/>
+                        <a:ea typeface="Arial" charset="0"/>
+                        <a:cs typeface="Arial" charset="0"/>
+                      </a:endParaRPr>
+                    </a:p>
+                  </a:txBody>
+                  <a:tcPr marL="73152" marR="73152" marT="73152" marB="73152" anchor="ctr">
+                    <a:lnL w="12700" cap="flat" cmpd="sng" algn="ctr">
+                      <a:solidFill>
+                        <a:srgbClr val="2B2F3A"/>
+                      </a:solidFill>
+                      <a:prstDash val="solid"/>
+                      <a:round/>
+                      <a:headEnd type="none" w="med" len="med"/>
+                      <a:tailEnd type="none" w="med" len="med"/>
+                    </a:lnL>
+                    <a:lnR w="12700" cap="flat" cmpd="sng" algn="ctr">
+                      <a:solidFill>
+                        <a:srgbClr val="2B2F3A"/>
+                      </a:solidFill>
+                      <a:prstDash val="solid"/>
+                      <a:round/>
+                      <a:headEnd type="none" w="med" len="med"/>
+                      <a:tailEnd type="none" w="med" len="med"/>
+                    </a:lnR>
+                    <a:lnT w="12700" cap="flat" cmpd="sng" algn="ctr">
+                      <a:solidFill>
+                        <a:srgbClr val="2B2F3A"/>
+                      </a:solidFill>
+                      <a:prstDash val="solid"/>
+                      <a:round/>
+                      <a:headEnd type="none" w="med" len="med"/>
+                      <a:tailEnd type="none" w="med" len="med"/>
+                    </a:lnT>
+                    <a:lnB w="12700" cap="flat" cmpd="sng" algn="ctr">
+                      <a:solidFill>
+                        <a:srgbClr val="2B2F3A"/>
+                      </a:solidFill>
+                      <a:prstDash val="solid"/>
+                      <a:round/>
+                      <a:headEnd type="none" w="med" len="med"/>
+                      <a:tailEnd type="none" w="med" len="med"/>
+                    </a:lnB>
+                    <a:solidFill>
+                      <a:srgbClr val="1B1E26"/>
+                    </a:solidFill>
+                  </a:tcPr>
+                </a:tc>
+              </a:tr>
+              <a:tr h="365760">
+                <a:tc>
+                  <a:txBody>
+                    <a:bodyPr/>
+                    <a:lstStyle/>
+                    <a:p>
+                      <a:pPr indent="0" marL="0">
+                        <a:buNone/>
+                      </a:pPr>
+                      <a:r>
+                        <a:rPr lang="en-US" sz="1150" dirty="0">
+                          <a:solidFill>
+                            <a:srgbClr val="F5F1EA"/>
+                          </a:solidFill>
+                          <a:latin typeface="Arial" pitchFamily="34" charset="0"/>
+                          <a:ea typeface="Arial" pitchFamily="34" charset="-122"/>
+                          <a:cs typeface="Arial" pitchFamily="34" charset="-120"/>
+                        </a:rPr>
+                        <a:t>Some input pairs have no evidence at all</a:t>
+                      </a:r>
+                      <a:endParaRPr lang="en-US" sz="1150" dirty="0">
+                        <a:latin typeface="Arial" charset="0"/>
+                        <a:ea typeface="Arial" charset="0"/>
+                        <a:cs typeface="Arial" charset="0"/>
+                      </a:endParaRPr>
+                    </a:p>
+                  </a:txBody>
+                  <a:tcPr marL="73152" marR="73152" marT="73152" marB="73152" anchor="ctr">
+                    <a:lnL w="12700" cap="flat" cmpd="sng" algn="ctr">
+                      <a:solidFill>
+                        <a:srgbClr val="2B2F3A"/>
+                      </a:solidFill>
+                      <a:prstDash val="solid"/>
+                      <a:round/>
+                      <a:headEnd type="none" w="med" len="med"/>
+                      <a:tailEnd type="none" w="med" len="med"/>
+                    </a:lnL>
+                    <a:lnR w="12700" cap="flat" cmpd="sng" algn="ctr">
+                      <a:solidFill>
+                        <a:srgbClr val="2B2F3A"/>
+                      </a:solidFill>
+                      <a:prstDash val="solid"/>
+                      <a:round/>
+                      <a:headEnd type="none" w="med" len="med"/>
+                      <a:tailEnd type="none" w="med" len="med"/>
+                    </a:lnR>
+                    <a:lnT w="12700" cap="flat" cmpd="sng" algn="ctr">
+                      <a:solidFill>
+                        <a:srgbClr val="2B2F3A"/>
+                      </a:solidFill>
+                      <a:prstDash val="solid"/>
+                      <a:round/>
+                      <a:headEnd type="none" w="med" len="med"/>
+                      <a:tailEnd type="none" w="med" len="med"/>
+                    </a:lnT>
+                    <a:lnB w="12700" cap="flat" cmpd="sng" algn="ctr">
+                      <a:solidFill>
+                        <a:srgbClr val="2B2F3A"/>
+                      </a:solidFill>
+                      <a:prstDash val="solid"/>
+                      <a:round/>
+                      <a:headEnd type="none" w="med" len="med"/>
+                      <a:tailEnd type="none" w="med" len="med"/>
+                    </a:lnB>
+                    <a:solidFill>
+                      <a:srgbClr val="1B1E26"/>
+                    </a:solidFill>
+                  </a:tcPr>
+                </a:tc>
+                <a:tc>
+                  <a:txBody>
+                    <a:bodyPr/>
+                    <a:lstStyle/>
+                    <a:p>
+                      <a:pPr indent="0" marL="0">
+                        <a:buNone/>
+                      </a:pPr>
+                      <a:r>
+                        <a:rPr lang="en-US" sz="1150" dirty="0">
+                          <a:solidFill>
+                            <a:srgbClr val="F5F1EA"/>
+                          </a:solidFill>
+                          <a:latin typeface="Arial" pitchFamily="34" charset="0"/>
+                          <a:ea typeface="Arial" pitchFamily="34" charset="-122"/>
+                          <a:cs typeface="Arial" pitchFamily="34" charset="-120"/>
+                        </a:rPr>
+                        <a:t>205 of 432 workflow x industry pairs have no cases in the library</a:t>
+                      </a:r>
+                      <a:endParaRPr lang="en-US" sz="1150" dirty="0">
+                        <a:latin typeface="Arial" charset="0"/>
+                        <a:ea typeface="Arial" charset="0"/>
+                        <a:cs typeface="Arial" charset="0"/>
+                      </a:endParaRPr>
+                    </a:p>
+                  </a:txBody>
+                  <a:tcPr marL="73152" marR="73152" marT="73152" marB="73152" anchor="ctr">
+                    <a:lnL w="12700" cap="flat" cmpd="sng" algn="ctr">
+                      <a:solidFill>
+                        <a:srgbClr val="2B2F3A"/>
+                      </a:solidFill>
+                      <a:prstDash val="solid"/>
+                      <a:round/>
+                      <a:headEnd type="none" w="med" len="med"/>
+                      <a:tailEnd type="none" w="med" len="med"/>
+                    </a:lnL>
+                    <a:lnR w="12700" cap="flat" cmpd="sng" algn="ctr">
+                      <a:solidFill>
+                        <a:srgbClr val="2B2F3A"/>
+                      </a:solidFill>
+                      <a:prstDash val="solid"/>
+                      <a:round/>
+                      <a:headEnd type="none" w="med" len="med"/>
+                      <a:tailEnd type="none" w="med" len="med"/>
+                    </a:lnR>
+                    <a:lnT w="12700" cap="flat" cmpd="sng" algn="ctr">
+                      <a:solidFill>
+                        <a:srgbClr val="2B2F3A"/>
+                      </a:solidFill>
+                      <a:prstDash val="solid"/>
+                      <a:round/>
+                      <a:headEnd type="none" w="med" len="med"/>
+                      <a:tailEnd type="none" w="med" len="med"/>
+                    </a:lnT>
+                    <a:lnB w="12700" cap="flat" cmpd="sng" algn="ctr">
+                      <a:solidFill>
+                        <a:srgbClr val="2B2F3A"/>
+                      </a:solidFill>
+                      <a:prstDash val="solid"/>
+                      <a:round/>
+                      <a:headEnd type="none" w="med" len="med"/>
+                      <a:tailEnd type="none" w="med" len="med"/>
+                    </a:lnB>
+                    <a:solidFill>
+                      <a:srgbClr val="1B1E26"/>
+                    </a:solidFill>
+                  </a:tcPr>
+                </a:tc>
+                <a:tc>
+                  <a:txBody>
+                    <a:bodyPr/>
+                    <a:lstStyle/>
+                    <a:p>
+                      <a:pPr indent="0" marL="0">
+                        <a:buNone/>
+                      </a:pPr>
+                      <a:r>
+                        <a:rPr lang="en-US" sz="1150" dirty="0">
+                          <a:solidFill>
+                            <a:srgbClr val="F5F1EA"/>
+                          </a:solidFill>
+                          <a:latin typeface="Arial" pitchFamily="34" charset="0"/>
+                          <a:ea typeface="Arial" pitchFamily="34" charset="-122"/>
+                          <a:cs typeface="Arial" pitchFamily="34" charset="-120"/>
+                        </a:rPr>
+                        <a:t>Flag unpopulated pairs in the dropdowns</a:t>
                       </a:r>
                       <a:endParaRPr lang="en-US" sz="1150" dirty="0">
                         <a:latin typeface="Arial" charset="0"/>

--- a/AASA_Final_Pitch_Deck.pptx
+++ b/AASA_Final_Pitch_Deck.pptx
@@ -1128,7 +1128,7 @@
           <a:p>
             <a:r>
               <a:rPr lang="en-US" dirty="0"/>
-              <a:t>All four targets met, including the trust score the earlier round missed. Say the limitation out loud before anyone asks: the build changed AND the participants changed between rounds, so we do not claim our fixes raised trust from 3 to 5 — that would need the same people testing both builds. Point at the credible intervals; 100% net value has a 72-99% interval and one changed answer moves it 12.5 points. If asked who tested: 8 practitioners at 7 real companies (SumUp, BMG, CoachHub, Delivery Hero, AUTODOC, Plan A, Ordio), 5 non-native English speakers, 5 on the regulated posture — all recruited through our own networks, which is convenience sampling and plausibly inflates trust. Numbers regenerate with scripts/telemetry_funnel.py --since '2026-07-27 23:00'.</a:t>
+              <a:t>All four targets met, including the trust score the earlier round missed. Say the limitation out loud before anyone asks: the build changed AND the participants changed between rounds, so we do not claim our fixes raised trust from 3 to 5 - that would need the same people testing both builds. Point at the credible intervals; 100% net value has a 72-99% interval and one changed answer moves it 12.5 points. If asked who tested: 8 practitioners at 7 real companies across payments, music rights, HR tech, coaching, food delivery, e-commerce parts and climate software - 5 non-native English speakers, 5 on the regulated posture. Names and employers are withheld in the submitted record; they consented to testing, not to being named. All recruited through our own networks, which is convenience sampling and plausibly inflates trust. Numbers regenerate with scripts/telemetry_funnel.py --since '2026-07-27 23:00'.</a:t>
             </a:r>
             <a:endParaRPr lang="en-US" dirty="0"/>
           </a:p>
